--- a/Lectures/week09/week09.pptx
+++ b/Lectures/week09/week09.pptx
@@ -22,6 +22,8 @@
     <p:sldId id="270" r:id="rId22"/>
     <p:sldId id="271" r:id="rId23"/>
     <p:sldId id="272" r:id="rId24"/>
+    <p:sldId id="273" r:id="rId25"/>
+    <p:sldId id="274" r:id="rId26"/>
   </p:sldIdLst>
   <p:sldSz cx="12191695" cy="6858000" type="screen4x3"/>
   <p:notesSz cx="6858000" cy="9144000"/>
@@ -652,76 +654,83 @@
           <a:lstStyle/>
           <a:p>
             <a:r>
-              <a:t>Four design rules. These are the professional practice.</a:t>
+              <a:t>Here's a real three-step chain, so you can see the shape.</a:t>
             </a:r>
           </a:p>
           <a:p/>
           <a:p>
             <a:r>
-              <a:t>Keep the chain short. Three steps is usually enough to be useful and short enough to inspect.</a:t>
-            </a:r>
-          </a:p>
-          <a:p>
-            <a:r>
-              <a:t>Resist adding a fourth — and notice from the arithmetic that each additional step costs you</a:t>
-            </a:r>
-          </a:p>
-          <a:p>
-            <a:r>
-              <a:t>more than the last.</a:t>
+              <a:t>The task: incoming student enquiries, sorted and drafted.</a:t>
             </a:r>
           </a:p>
           <a:p/>
           <a:p>
             <a:r>
-              <a:t>Make every step inspectable. Have it write down what it did at each stage. If you can't see the</a:t>
-            </a:r>
-          </a:p>
-          <a:p>
-            <a:r>
-              <a:t>middle, you can't debug the end — you'll know the output is wrong and have no idea which step</a:t>
-            </a:r>
-          </a:p>
-          <a:p>
-            <a:r>
-              <a:t>broke.</a:t>
+              <a:t>Step one, classify. Read the enquiry, output one of four labels, nothing else. Notice how tightly</a:t>
+            </a:r>
+          </a:p>
+          <a:p>
+            <a:r>
+              <a:t>constrained the output is — one word from a fixed list. That's deliberate. A step whose output is</a:t>
+            </a:r>
+          </a:p>
+          <a:p>
+            <a:r>
+              <a:t>one of four values can be checked at a glance, and it cannot silently corrupt the next step with a</a:t>
+            </a:r>
+          </a:p>
+          <a:p>
+            <a:r>
+              <a:t>paragraph of hedging.</a:t>
             </a:r>
           </a:p>
           <a:p/>
           <a:p>
             <a:r>
-              <a:t>Put the human before anything irreversible. This is the line that keeps you out of trouble.</a:t>
-            </a:r>
-          </a:p>
-          <a:p>
-            <a:r>
-              <a:t>Drafting, sorting, summarising, flagging — automate all of it. Sending, posting, deleting,</a:t>
-            </a:r>
-          </a:p>
-          <a:p>
-            <a:r>
-              <a:t>paying — approve first. The asymmetry is simple: if a draft is wrong you fix it; if a message</a:t>
-            </a:r>
-          </a:p>
-          <a:p>
-            <a:r>
-              <a:t>is sent you can't unsend it.</a:t>
+              <a:t>Step two, retrieve and draft. Using only the regulations, draft a reply, quote the clause, and</a:t>
+            </a:r>
+          </a:p>
+          <a:p>
+            <a:r>
+              <a:t>output NOT IN SOURCES if it isn't covered. That's week seven, dropped straight into a workflow.</a:t>
             </a:r>
           </a:p>
           <a:p/>
           <a:p>
             <a:r>
-              <a:t>And give it the narrowest tools that do the job. It cannot misuse a capability it doesn't have.</a:t>
-            </a:r>
-          </a:p>
-          <a:p>
-            <a:r>
-              <a:t>This is the single most reliable control available to you, because it doesn't depend on the</a:t>
-            </a:r>
-          </a:p>
-          <a:p>
-            <a:r>
-              <a:t>system behaving well. Everything else is a request. This is a wall.</a:t>
+              <a:t>Step three, format. Standard greeting and signature, and — the crucial constraint — change no</a:t>
+            </a:r>
+          </a:p>
+          <a:p>
+            <a:r>
+              <a:t>factual content. Without that line, a formatting step will smooth and adjust, and you'll have</a:t>
+            </a:r>
+          </a:p>
+          <a:p>
+            <a:r>
+              <a:t>introduced a change nobody reviewed.</a:t>
+            </a:r>
+          </a:p>
+          <a:p/>
+          <a:p>
+            <a:r>
+              <a:t>And then a person reads it and sends it. That's the fourth step and it is not automated. Which is</a:t>
+            </a:r>
+          </a:p>
+          <a:p>
+            <a:r>
+              <a:t>the whole design: three cheap steps that prepare, one human step that commits.</a:t>
+            </a:r>
+          </a:p>
+          <a:p/>
+          <a:p>
+            <a:r>
+              <a:t>Notice also that step two can refuse. Refusals propagate to the human, which is exactly right —</a:t>
+            </a:r>
+          </a:p>
+          <a:p>
+            <a:r>
+              <a:t>the uncovered cases are the ones that most need a person.</a:t>
             </a:r>
           </a:p>
         </p:txBody>
@@ -791,79 +800,82 @@
           <a:lstStyle/>
           <a:p>
             <a:r>
-              <a:t>And here's the slide that will save you the most time.</a:t>
+              <a:t>Worth automating and not. This is the slide that saves you from building things you'll abandon.</a:t>
             </a:r>
           </a:p>
           <a:p/>
           <a:p>
             <a:r>
-              <a:t>Most tasks people want to automate are better served by one good prompt.</a:t>
+              <a:t>Worth it: sorting a queue by type. Extracting fields from many similar documents. Reformatting</a:t>
+            </a:r>
+          </a:p>
+          <a:p>
+            <a:r>
+              <a:t>between two fixed shapes. Flagging items for attention. Look at what those have in common — all</a:t>
+            </a:r>
+          </a:p>
+          <a:p>
+            <a:r>
+              <a:t>repetitive, all recoverable, and all checkable at a glance. That last one matters: if verifying</a:t>
+            </a:r>
+          </a:p>
+          <a:p>
+            <a:r>
+              <a:t>the output takes as long as doing the task, you've gained nothing.</a:t>
             </a:r>
           </a:p>
           <a:p/>
           <a:p>
             <a:r>
-              <a:t>There's real enthusiasm for building agents at the moment, and a lot of it produces fragile</a:t>
-            </a:r>
-          </a:p>
-          <a:p>
-            <a:r>
-              <a:t>systems that do badly what a single well-specified request did well.</a:t>
+              <a:t>Not worth it: anything you do twice a year — the automation costs more than the task. Anything</a:t>
+            </a:r>
+          </a:p>
+          <a:p>
+            <a:r>
+              <a:t>where you cannot specify the judgment, because if you can't write the rule the system can't</a:t>
+            </a:r>
+          </a:p>
+          <a:p>
+            <a:r>
+              <a:t>follow it. And anything whose output goes straight to a person without review.</a:t>
             </a:r>
           </a:p>
           <a:p/>
           <a:p>
             <a:r>
-              <a:t>Ask two questions before building anything multi-step.</a:t>
+              <a:t>And the honest test, which I'd like you to carry: would you hand this task, with these</a:t>
+            </a:r>
+          </a:p>
+          <a:p>
+            <a:r>
+              <a:t>instructions, to a capable new colleague on their first day — and let them act on it</a:t>
+            </a:r>
+          </a:p>
+          <a:p>
+            <a:r>
+              <a:t>unsupervised?</a:t>
             </a:r>
           </a:p>
           <a:p/>
           <a:p>
             <a:r>
-              <a:t>Is this genuinely repetitive? Not "could it happen again" — do you actually do it many times?</a:t>
-            </a:r>
-          </a:p>
-          <a:p>
-            <a:r>
-              <a:t>If you do it twice a year, automating it costs more than doing it.</a:t>
+              <a:t>If the answer is no, don't automate it either. A new colleague is actually a generous comparison:</a:t>
+            </a:r>
+          </a:p>
+          <a:p>
+            <a:r>
+              <a:t>they'd ask when confused, they'd notice something odd, they'd remember the last conversation.</a:t>
+            </a:r>
+          </a:p>
+          <a:p>
+            <a:r>
+              <a:t>Your automation does none of those things.</a:t>
             </a:r>
           </a:p>
           <a:p/>
           <a:p>
             <a:r>
-              <a:t>And what does a mistake cost? If a mistake is embarrassing, expensive, or reaches a patient or</a:t>
-            </a:r>
-          </a:p>
-          <a:p>
-            <a:r>
-              <a:t>client, then removing the human is the wrong direction, and the answer is a good prompt plus</a:t>
-            </a:r>
-          </a:p>
-          <a:p>
-            <a:r>
-              <a:t>your judgment.</a:t>
-            </a:r>
-          </a:p>
-          <a:p/>
-          <a:p>
-            <a:r>
-              <a:t>The honest summary: automation is worth it when the task is genuinely repetitive and the cost</a:t>
-            </a:r>
-          </a:p>
-          <a:p>
-            <a:r>
-              <a:t>of a mistake is low. That's a narrower set of situations than the enthusiasm suggests, and</a:t>
-            </a:r>
-          </a:p>
-          <a:p>
-            <a:r>
-              <a:t>knowing that is a professional skill.</a:t>
-            </a:r>
-          </a:p>
-          <a:p/>
-          <a:p>
-            <a:r>
-              <a:t>Now — with all of that said, let's build one, because the narrow set is real and useful.</a:t>
+              <a:t>If you wouldn't trust the new colleague unsupervised, you shouldn't trust the chain.</a:t>
             </a:r>
           </a:p>
         </p:txBody>
@@ -933,7 +945,76 @@
           <a:lstStyle/>
           <a:p>
             <a:r>
-              <a:t>Part three. Twenty minutes, three steps maximum.</a:t>
+              <a:t>Four design rules. These are the professional practice.</a:t>
+            </a:r>
+          </a:p>
+          <a:p/>
+          <a:p>
+            <a:r>
+              <a:t>Keep the chain short. Three steps is usually enough to be useful and short enough to inspect.</a:t>
+            </a:r>
+          </a:p>
+          <a:p>
+            <a:r>
+              <a:t>Resist adding a fourth — and notice from the arithmetic that each additional step costs you</a:t>
+            </a:r>
+          </a:p>
+          <a:p>
+            <a:r>
+              <a:t>more than the last.</a:t>
+            </a:r>
+          </a:p>
+          <a:p/>
+          <a:p>
+            <a:r>
+              <a:t>Make every step inspectable. Have it write down what it did at each stage. If you can't see the</a:t>
+            </a:r>
+          </a:p>
+          <a:p>
+            <a:r>
+              <a:t>middle, you can't debug the end — you'll know the output is wrong and have no idea which step</a:t>
+            </a:r>
+          </a:p>
+          <a:p>
+            <a:r>
+              <a:t>broke.</a:t>
+            </a:r>
+          </a:p>
+          <a:p/>
+          <a:p>
+            <a:r>
+              <a:t>Put the human before anything irreversible. This is the line that keeps you out of trouble.</a:t>
+            </a:r>
+          </a:p>
+          <a:p>
+            <a:r>
+              <a:t>Drafting, sorting, summarising, flagging — automate all of it. Sending, posting, deleting,</a:t>
+            </a:r>
+          </a:p>
+          <a:p>
+            <a:r>
+              <a:t>paying — approve first. The asymmetry is simple: if a draft is wrong you fix it; if a message</a:t>
+            </a:r>
+          </a:p>
+          <a:p>
+            <a:r>
+              <a:t>is sent you can't unsend it.</a:t>
+            </a:r>
+          </a:p>
+          <a:p/>
+          <a:p>
+            <a:r>
+              <a:t>And give it the narrowest tools that do the job. It cannot misuse a capability it doesn't have.</a:t>
+            </a:r>
+          </a:p>
+          <a:p>
+            <a:r>
+              <a:t>This is the single most reliable control available to you, because it doesn't depend on the</a:t>
+            </a:r>
+          </a:p>
+          <a:p>
+            <a:r>
+              <a:t>system behaving well. Everything else is a request. This is a wall.</a:t>
             </a:r>
           </a:p>
         </p:txBody>
@@ -1003,83 +1084,79 @@
           <a:lstStyle/>
           <a:p>
             <a:r>
-              <a:t>Twenty minutes. Three steps maximum — if you find yourself wanting a fourth, cut something.</a:t>
+              <a:t>And here's the slide that will save you the most time.</a:t>
             </a:r>
           </a:p>
           <a:p/>
           <a:p>
             <a:r>
-              <a:t>One. Pick a repetitive task with three natural stages. Intake, process, format. Read, extract,</a:t>
-            </a:r>
-          </a:p>
-          <a:p>
-            <a:r>
-              <a:t>summarise. Collect, classify, route. Some examples: incoming enquiries sorted by urgency and</a:t>
-            </a:r>
-          </a:p>
-          <a:p>
-            <a:r>
-              <a:t>drafted a reply. A set of references checked for format and flagged. Student feedback grouped</a:t>
-            </a:r>
-          </a:p>
-          <a:p>
-            <a:r>
-              <a:t>into themes.</a:t>
+              <a:t>Most tasks people want to automate are better served by one good prompt.</a:t>
             </a:r>
           </a:p>
           <a:p/>
           <a:p>
             <a:r>
-              <a:t>Two. Write each step as a separate instruction with its own input and output. And notice the</a:t>
-            </a:r>
-          </a:p>
-          <a:p>
-            <a:r>
-              <a:t>sub-point, because it's a design principle worth having: step two shouldn't need to know how</a:t>
-            </a:r>
-          </a:p>
-          <a:p>
-            <a:r>
-              <a:t>step one did its job, only what it produced. Clean handoffs make failures locatable.</a:t>
+              <a:t>There's real enthusiasm for building agents at the moment, and a lot of it produces fragile</a:t>
+            </a:r>
+          </a:p>
+          <a:p>
+            <a:r>
+              <a:t>systems that do badly what a single well-specified request did well.</a:t>
             </a:r>
           </a:p>
           <a:p/>
           <a:p>
             <a:r>
-              <a:t>Three, and this is the actual exercise: run it, then deliberately give step one bad input and</a:t>
-            </a:r>
-          </a:p>
-          <a:p>
-            <a:r>
-              <a:t>watch what step three produces. Feed it something incomplete, or wrong, or empty. Note whether</a:t>
-            </a:r>
-          </a:p>
-          <a:p>
-            <a:r>
-              <a:t>anything anywhere signalled a problem.</a:t>
+              <a:t>Ask two questions before building anything multi-step.</a:t>
             </a:r>
           </a:p>
           <a:p/>
           <a:p>
             <a:r>
-              <a:t>It usually won't. That's silent failure, and you'll have produced it yourself.</a:t>
+              <a:t>Is this genuinely repetitive? Not "could it happen again" — do you actually do it many times?</a:t>
+            </a:r>
+          </a:p>
+          <a:p>
+            <a:r>
+              <a:t>If you do it twice a year, automating it costs more than doing it.</a:t>
             </a:r>
           </a:p>
           <a:p/>
           <a:p>
             <a:r>
-              <a:t>Four. Write one sentence: where would you put the human?</a:t>
+              <a:t>And what does a mistake cost? If a mistake is embarrassing, expensive, or reaches a patient or</a:t>
+            </a:r>
+          </a:p>
+          <a:p>
+            <a:r>
+              <a:t>client, then removing the human is the wrong direction, and the answer is a good prompt plus</a:t>
+            </a:r>
+          </a:p>
+          <a:p>
+            <a:r>
+              <a:t>your judgment.</a:t>
             </a:r>
           </a:p>
           <a:p/>
           <a:p>
             <a:r>
-              <a:t>[If nobody is building, run the provided three-step chain on screen — first clean, then with</a:t>
-            </a:r>
-          </a:p>
-          <a:p>
-            <a:r>
-              <a:t>corrupted input at step one. The second run is the lesson.]</a:t>
+              <a:t>The honest summary: automation is worth it when the task is genuinely repetitive and the cost</a:t>
+            </a:r>
+          </a:p>
+          <a:p>
+            <a:r>
+              <a:t>of a mistake is low. That's a narrower set of situations than the enthusiasm suggests, and</a:t>
+            </a:r>
+          </a:p>
+          <a:p>
+            <a:r>
+              <a:t>knowing that is a professional skill.</a:t>
+            </a:r>
+          </a:p>
+          <a:p/>
+          <a:p>
+            <a:r>
+              <a:t>Now — with all of that said, let's build one, because the narrow set is real and useful.</a:t>
             </a:r>
           </a:p>
         </p:txBody>
@@ -1149,78 +1226,7 @@
           <a:lstStyle/>
           <a:p>
             <a:r>
-              <a:t>What typically happens.</a:t>
-            </a:r>
-          </a:p>
-          <a:p/>
-          <a:p>
-            <a:r>
-              <a:t>It worked on clean input, and it felt genuinely impressive. Three steps running by themselves</a:t>
-            </a:r>
-          </a:p>
-          <a:p>
-            <a:r>
-              <a:t>is a good feeling and I don't want to take that away.</a:t>
-            </a:r>
-          </a:p>
-          <a:p/>
-          <a:p>
-            <a:r>
-              <a:t>Then with bad input at step one, step three still produced a confident, well-formatted result.</a:t>
-            </a:r>
-          </a:p>
-          <a:p/>
-          <a:p>
-            <a:r>
-              <a:t>Nothing anywhere said "something is wrong." No error, no warning, no hedge.</a:t>
-            </a:r>
-          </a:p>
-          <a:p/>
-          <a:p>
-            <a:r>
-              <a:t>And — this is the part to notice — the output looked exactly as good as the correct one. Same</a:t>
-            </a:r>
-          </a:p>
-          <a:p>
-            <a:r>
-              <a:t>formatting, same confidence, same completeness. If I showed you both without telling you which</a:t>
-            </a:r>
-          </a:p>
-          <a:p>
-            <a:r>
-              <a:t>was which, you could not pick.</a:t>
-            </a:r>
-          </a:p>
-          <a:p/>
-          <a:p>
-            <a:r>
-              <a:t>That's silent failure. And you just built it deliberately, which means you now know what it</a:t>
-            </a:r>
-          </a:p>
-          <a:p>
-            <a:r>
-              <a:t>looks like from the inside.</a:t>
-            </a:r>
-          </a:p>
-          <a:p/>
-          <a:p>
-            <a:r>
-              <a:t>The last line is the practical conclusion. In real use, you wouldn't have known. There was no</a:t>
-            </a:r>
-          </a:p>
-          <a:p>
-            <a:r>
-              <a:t>signal available to you. Which is exactly why the human goes before anything irreversible — not</a:t>
-            </a:r>
-          </a:p>
-          <a:p>
-            <a:r>
-              <a:t>because the system is bad, but because the system has no way to tell you when it's wrong, and</a:t>
-            </a:r>
-          </a:p>
-          <a:p>
-            <a:r>
-              <a:t>you have no way to tell from the output.</a:t>
+              <a:t>Part three. Twenty minutes, three steps maximum.</a:t>
             </a:r>
           </a:p>
         </p:txBody>
@@ -1290,62 +1296,83 @@
           <a:lstStyle/>
           <a:p>
             <a:r>
-              <a:t>What's examinable. Five items.</a:t>
+              <a:t>Twenty minutes. Three steps maximum — if you find yourself wanting a fourth, cut something.</a:t>
             </a:r>
           </a:p>
           <a:p/>
           <a:p>
             <a:r>
-              <a:t>Agent versus chatbot, and specifically what you lose — the unconscious checking.</a:t>
+              <a:t>One. Pick a repetitive task with three natural stages. Intake, process, format. Read, extract,</a:t>
+            </a:r>
+          </a:p>
+          <a:p>
+            <a:r>
+              <a:t>summarise. Collect, classify, route. Some examples: incoming enquiries sorted by urgency and</a:t>
+            </a:r>
+          </a:p>
+          <a:p>
+            <a:r>
+              <a:t>drafted a reply. A set of references checked for format and flagged. Student feedback grouped</a:t>
+            </a:r>
+          </a:p>
+          <a:p>
+            <a:r>
+              <a:t>into themes.</a:t>
             </a:r>
           </a:p>
           <a:p/>
           <a:p>
             <a:r>
-              <a:t>The loop, and that termination is a judgment it makes poorly. Be ready to explain why: "am I</a:t>
-            </a:r>
-          </a:p>
-          <a:p>
-            <a:r>
-              <a:t>finished?" isn't a fact to retrieve.</a:t>
+              <a:t>Two. Write each step as a separate instruction with its own input and output. And notice the</a:t>
+            </a:r>
+          </a:p>
+          <a:p>
+            <a:r>
+              <a:t>sub-point, because it's a design principle worth having: step two shouldn't need to know how</a:t>
+            </a:r>
+          </a:p>
+          <a:p>
+            <a:r>
+              <a:t>step one did its job, only what it produced. Clean handoffs make failures locatable.</a:t>
             </a:r>
           </a:p>
           <a:p/>
           <a:p>
             <a:r>
-              <a:t>Tool use: the model requests, the system performs, the result comes back into the context as</a:t>
-            </a:r>
-          </a:p>
-          <a:p>
-            <a:r>
-              <a:t>text. That last part sets up week twelve, and I may examine the connection.</a:t>
+              <a:t>Three, and this is the actual exercise: run it, then deliberately give step one bad input and</a:t>
+            </a:r>
+          </a:p>
+          <a:p>
+            <a:r>
+              <a:t>watch what step three produces. Feed it something incomplete, or wrong, or empty. Note whether</a:t>
+            </a:r>
+          </a:p>
+          <a:p>
+            <a:r>
+              <a:t>anything anywhere signalled a problem.</a:t>
             </a:r>
           </a:p>
           <a:p/>
           <a:p>
             <a:r>
-              <a:t>Compounding error, with the numbers. You should be able to do this calculation. Ninety-five</a:t>
-            </a:r>
-          </a:p>
-          <a:p>
-            <a:r>
-              <a:t>percent over ten steps is about sixty. And you should be able to say why it's worse than</a:t>
-            </a:r>
-          </a:p>
-          <a:p>
-            <a:r>
-              <a:t>independent error — because steps inherit each other's output.</a:t>
+              <a:t>It usually won't. That's silent failure, and you'll have produced it yourself.</a:t>
             </a:r>
           </a:p>
           <a:p/>
           <a:p>
             <a:r>
-              <a:t>And the three failures plus the four design rules. A likely exam question gives you a described</a:t>
-            </a:r>
-          </a:p>
-          <a:p>
-            <a:r>
-              <a:t>workflow and asks which design rule it violates.</a:t>
+              <a:t>Four. Write one sentence: where would you put the human?</a:t>
+            </a:r>
+          </a:p>
+          <a:p/>
+          <a:p>
+            <a:r>
+              <a:t>[If nobody is building, run the provided three-step chain on screen — first clean, then with</a:t>
+            </a:r>
+          </a:p>
+          <a:p>
+            <a:r>
+              <a:t>corrupted input at step one. The second run is the lesson.]</a:t>
             </a:r>
           </a:p>
         </p:txBody>
@@ -1415,84 +1442,78 @@
           <a:lstStyle/>
           <a:p>
             <a:r>
-              <a:t>Five things.</a:t>
+              <a:t>What typically happens.</a:t>
             </a:r>
           </a:p>
           <a:p/>
           <a:p>
             <a:r>
-              <a:t>An agent acts across several steps, and what you lose is the checking you were doing for free</a:t>
-            </a:r>
-          </a:p>
-          <a:p>
-            <a:r>
-              <a:t>without noticing.</a:t>
+              <a:t>It worked on clean input, and it felt genuinely impressive. Three steps running by themselves</a:t>
+            </a:r>
+          </a:p>
+          <a:p>
+            <a:r>
+              <a:t>is a good feeling and I don't want to take that away.</a:t>
             </a:r>
           </a:p>
           <a:p/>
           <a:p>
             <a:r>
-              <a:t>Ninety-five percent per step is about sixty percent over ten steps, and errors are inherited</a:t>
-            </a:r>
-          </a:p>
-          <a:p>
-            <a:r>
-              <a:t>rather than averaged. If you remember one number this semester, make it that one.</a:t>
+              <a:t>Then with bad input at step one, step three still produced a confident, well-formatted result.</a:t>
             </a:r>
           </a:p>
           <a:p/>
           <a:p>
             <a:r>
-              <a:t>Silent failure is the characteristic agent problem. Wrong input, confident output, no signal</a:t>
-            </a:r>
-          </a:p>
-          <a:p>
-            <a:r>
-              <a:t>anywhere.</a:t>
+              <a:t>Nothing anywhere said "something is wrong." No error, no warning, no hedge.</a:t>
             </a:r>
           </a:p>
           <a:p/>
           <a:p>
             <a:r>
-              <a:t>Four design rules: short chains, inspectable steps, human before anything irreversible,</a:t>
-            </a:r>
-          </a:p>
-          <a:p>
-            <a:r>
-              <a:t>narrowest tools.</a:t>
+              <a:t>And — this is the part to notice — the output looked exactly as good as the correct one. Same</a:t>
+            </a:r>
+          </a:p>
+          <a:p>
+            <a:r>
+              <a:t>formatting, same confidence, same completeness. If I showed you both without telling you which</a:t>
+            </a:r>
+          </a:p>
+          <a:p>
+            <a:r>
+              <a:t>was which, you could not pick.</a:t>
             </a:r>
           </a:p>
           <a:p/>
           <a:p>
             <a:r>
-              <a:t>And most tasks are better served by one good prompt. Knowing when not to build something is a</a:t>
-            </a:r>
-          </a:p>
-          <a:p>
-            <a:r>
-              <a:t>real skill and it will save you more time than any technique in this course.</a:t>
+              <a:t>That's silent failure. And you just built it deliberately, which means you now know what it</a:t>
+            </a:r>
+          </a:p>
+          <a:p>
+            <a:r>
+              <a:t>looks like from the inside.</a:t>
             </a:r>
           </a:p>
           <a:p/>
           <a:p>
             <a:r>
-              <a:t>Next week you put it all together — you design something end to end for your own field. Bring</a:t>
-            </a:r>
-          </a:p>
-          <a:p>
-            <a:r>
-              <a:t>a real problem from your own work. That session is the centre of the course, and it works</a:t>
-            </a:r>
-          </a:p>
-          <a:p>
-            <a:r>
-              <a:t>much better if you arrive with something you actually care about.</a:t>
-            </a:r>
-          </a:p>
-          <a:p/>
-          <a:p>
-            <a:r>
-              <a:t>Questions?</a:t>
+              <a:t>The last line is the practical conclusion. In real use, you wouldn't have known. There was no</a:t>
+            </a:r>
+          </a:p>
+          <a:p>
+            <a:r>
+              <a:t>signal available to you. Which is exactly why the human goes before anything irreversible — not</a:t>
+            </a:r>
+          </a:p>
+          <a:p>
+            <a:r>
+              <a:t>because the system is bad, but because the system has no way to tell you when it's wrong, and</a:t>
+            </a:r>
+          </a:p>
+          <a:p>
+            <a:r>
+              <a:t>you have no way to tell from the output.</a:t>
             </a:r>
           </a:p>
         </p:txBody>
@@ -1518,6 +1539,278 @@
 </file>
 
 <file path=ppt/notesSlides/notesSlide17.xml><?xml version="1.0" encoding="utf-8"?>
+<p:notes xmlns:a="http://schemas.openxmlformats.org/drawingml/2006/main" xmlns:p="http://schemas.openxmlformats.org/presentationml/2006/main" xmlns:r="http://schemas.openxmlformats.org/officeDocument/2006/relationships">
+  <p:cSld>
+    <p:spTree>
+      <p:nvGrpSpPr>
+        <p:cNvPr id="1" name=""/>
+        <p:cNvGrpSpPr/>
+        <p:nvPr/>
+      </p:nvGrpSpPr>
+      <p:grpSpPr>
+        <a:xfrm>
+          <a:off x="0" y="0"/>
+          <a:ext cx="0" cy="0"/>
+          <a:chOff x="0" y="0"/>
+          <a:chExt cx="0" cy="0"/>
+        </a:xfrm>
+      </p:grpSpPr>
+      <p:sp>
+        <p:nvSpPr>
+          <p:cNvPr id="2" name="Slide Image Placeholder 1"/>
+          <p:cNvSpPr>
+            <a:spLocks noGrp="1"/>
+          </p:cNvSpPr>
+          <p:nvPr>
+            <p:ph type="sldImg" idx="2"/>
+          </p:nvPr>
+        </p:nvSpPr>
+        <p:spPr/>
+      </p:sp>
+      <p:sp>
+        <p:nvSpPr>
+          <p:cNvPr id="3" name="Notes Placeholder 2"/>
+          <p:cNvSpPr>
+            <a:spLocks noGrp="1"/>
+          </p:cNvSpPr>
+          <p:nvPr>
+            <p:ph type="body" idx="3" sz="quarter"/>
+          </p:nvPr>
+        </p:nvSpPr>
+        <p:spPr/>
+        <p:txBody>
+          <a:bodyPr/>
+          <a:lstStyle/>
+          <a:p>
+            <a:r>
+              <a:t>What's examinable. Five items.</a:t>
+            </a:r>
+          </a:p>
+          <a:p/>
+          <a:p>
+            <a:r>
+              <a:t>Agent versus chatbot, and specifically what you lose — the unconscious checking.</a:t>
+            </a:r>
+          </a:p>
+          <a:p/>
+          <a:p>
+            <a:r>
+              <a:t>The loop, and that termination is a judgment it makes poorly. Be ready to explain why: "am I</a:t>
+            </a:r>
+          </a:p>
+          <a:p>
+            <a:r>
+              <a:t>finished?" isn't a fact to retrieve.</a:t>
+            </a:r>
+          </a:p>
+          <a:p/>
+          <a:p>
+            <a:r>
+              <a:t>Tool use: the model requests, the system performs, the result comes back into the context as</a:t>
+            </a:r>
+          </a:p>
+          <a:p>
+            <a:r>
+              <a:t>text. That last part sets up week twelve, and I may examine the connection.</a:t>
+            </a:r>
+          </a:p>
+          <a:p/>
+          <a:p>
+            <a:r>
+              <a:t>Compounding error, with the numbers. You should be able to do this calculation. Ninety-five</a:t>
+            </a:r>
+          </a:p>
+          <a:p>
+            <a:r>
+              <a:t>percent over ten steps is about sixty. And you should be able to say why it's worse than</a:t>
+            </a:r>
+          </a:p>
+          <a:p>
+            <a:r>
+              <a:t>independent error — because steps inherit each other's output.</a:t>
+            </a:r>
+          </a:p>
+          <a:p/>
+          <a:p>
+            <a:r>
+              <a:t>And the three failures plus the four design rules. A likely exam question gives you a described</a:t>
+            </a:r>
+          </a:p>
+          <a:p>
+            <a:r>
+              <a:t>workflow and asks which design rule it violates.</a:t>
+            </a:r>
+          </a:p>
+        </p:txBody>
+      </p:sp>
+      <p:sp>
+        <p:nvSpPr>
+          <p:cNvPr id="4" name="Slide Number Placeholder 3"/>
+          <p:cNvSpPr>
+            <a:spLocks noGrp="1"/>
+          </p:cNvSpPr>
+          <p:nvPr>
+            <p:ph type="sldNum" idx="5" sz="quarter"/>
+          </p:nvPr>
+        </p:nvSpPr>
+        <p:spPr/>
+      </p:sp>
+    </p:spTree>
+  </p:cSld>
+  <p:clrMapOvr>
+    <a:masterClrMapping/>
+  </p:clrMapOvr>
+</p:notes>
+</file>
+
+<file path=ppt/notesSlides/notesSlide18.xml><?xml version="1.0" encoding="utf-8"?>
+<p:notes xmlns:a="http://schemas.openxmlformats.org/drawingml/2006/main" xmlns:p="http://schemas.openxmlformats.org/presentationml/2006/main" xmlns:r="http://schemas.openxmlformats.org/officeDocument/2006/relationships">
+  <p:cSld>
+    <p:spTree>
+      <p:nvGrpSpPr>
+        <p:cNvPr id="1" name=""/>
+        <p:cNvGrpSpPr/>
+        <p:nvPr/>
+      </p:nvGrpSpPr>
+      <p:grpSpPr>
+        <a:xfrm>
+          <a:off x="0" y="0"/>
+          <a:ext cx="0" cy="0"/>
+          <a:chOff x="0" y="0"/>
+          <a:chExt cx="0" cy="0"/>
+        </a:xfrm>
+      </p:grpSpPr>
+      <p:sp>
+        <p:nvSpPr>
+          <p:cNvPr id="2" name="Slide Image Placeholder 1"/>
+          <p:cNvSpPr>
+            <a:spLocks noGrp="1"/>
+          </p:cNvSpPr>
+          <p:nvPr>
+            <p:ph type="sldImg" idx="2"/>
+          </p:nvPr>
+        </p:nvSpPr>
+        <p:spPr/>
+      </p:sp>
+      <p:sp>
+        <p:nvSpPr>
+          <p:cNvPr id="3" name="Notes Placeholder 2"/>
+          <p:cNvSpPr>
+            <a:spLocks noGrp="1"/>
+          </p:cNvSpPr>
+          <p:nvPr>
+            <p:ph type="body" idx="3" sz="quarter"/>
+          </p:nvPr>
+        </p:nvSpPr>
+        <p:spPr/>
+        <p:txBody>
+          <a:bodyPr/>
+          <a:lstStyle/>
+          <a:p>
+            <a:r>
+              <a:t>Five things.</a:t>
+            </a:r>
+          </a:p>
+          <a:p/>
+          <a:p>
+            <a:r>
+              <a:t>An agent acts across several steps, and what you lose is the checking you were doing for free</a:t>
+            </a:r>
+          </a:p>
+          <a:p>
+            <a:r>
+              <a:t>without noticing.</a:t>
+            </a:r>
+          </a:p>
+          <a:p/>
+          <a:p>
+            <a:r>
+              <a:t>Ninety-five percent per step is about sixty percent over ten steps, and errors are inherited</a:t>
+            </a:r>
+          </a:p>
+          <a:p>
+            <a:r>
+              <a:t>rather than averaged. If you remember one number this semester, make it that one.</a:t>
+            </a:r>
+          </a:p>
+          <a:p/>
+          <a:p>
+            <a:r>
+              <a:t>Silent failure is the characteristic agent problem. Wrong input, confident output, no signal</a:t>
+            </a:r>
+          </a:p>
+          <a:p>
+            <a:r>
+              <a:t>anywhere.</a:t>
+            </a:r>
+          </a:p>
+          <a:p/>
+          <a:p>
+            <a:r>
+              <a:t>Four design rules: short chains, inspectable steps, human before anything irreversible,</a:t>
+            </a:r>
+          </a:p>
+          <a:p>
+            <a:r>
+              <a:t>narrowest tools.</a:t>
+            </a:r>
+          </a:p>
+          <a:p/>
+          <a:p>
+            <a:r>
+              <a:t>And most tasks are better served by one good prompt. Knowing when not to build something is a</a:t>
+            </a:r>
+          </a:p>
+          <a:p>
+            <a:r>
+              <a:t>real skill and it will save you more time than any technique in this course.</a:t>
+            </a:r>
+          </a:p>
+          <a:p/>
+          <a:p>
+            <a:r>
+              <a:t>Next week you put it all together — you design something end to end for your own field. Bring</a:t>
+            </a:r>
+          </a:p>
+          <a:p>
+            <a:r>
+              <a:t>a real problem from your own work. That session is the centre of the course, and it works</a:t>
+            </a:r>
+          </a:p>
+          <a:p>
+            <a:r>
+              <a:t>much better if you arrive with something you actually care about.</a:t>
+            </a:r>
+          </a:p>
+          <a:p/>
+          <a:p>
+            <a:r>
+              <a:t>Questions?</a:t>
+            </a:r>
+          </a:p>
+        </p:txBody>
+      </p:sp>
+      <p:sp>
+        <p:nvSpPr>
+          <p:cNvPr id="4" name="Slide Number Placeholder 3"/>
+          <p:cNvSpPr>
+            <a:spLocks noGrp="1"/>
+          </p:cNvSpPr>
+          <p:nvPr>
+            <p:ph type="sldNum" idx="5" sz="quarter"/>
+          </p:nvPr>
+        </p:nvSpPr>
+        <p:spPr/>
+      </p:sp>
+    </p:spTree>
+  </p:cSld>
+  <p:clrMapOvr>
+    <a:masterClrMapping/>
+  </p:clrMapOvr>
+</p:notes>
+</file>
+
+<file path=ppt/notesSlides/notesSlide19.xml><?xml version="1.0" encoding="utf-8"?>
 <p:notes xmlns:a="http://schemas.openxmlformats.org/drawingml/2006/main" xmlns:p="http://schemas.openxmlformats.org/presentationml/2006/main" xmlns:r="http://schemas.openxmlformats.org/officeDocument/2006/relationships">
   <p:cSld>
     <p:spTree>
@@ -5950,7 +6243,7 @@
                 </a:solidFill>
                 <a:latin typeface="Calibri Light"/>
               </a:rPr>
-              <a:t>Designing Around It</a:t>
+              <a:t>A Three-Step Chain, Written Out</a:t>
             </a:r>
           </a:p>
         </p:txBody>
@@ -6036,7 +6329,36 @@
                 </a:solidFill>
                 <a:latin typeface="Calibri"/>
               </a:rPr>
-              <a:t>•  Keep the chain short.</a:t>
+              <a:t>•  The task: incoming student enquiries, sorted and drafted.</a:t>
+            </a:r>
+          </a:p>
+          <a:p>
+            <a:pPr>
+              <a:lnSpc>
+                <a:spcPct val="115000"/>
+              </a:lnSpc>
+              <a:spcAft>
+                <a:spcPts val="1000"/>
+              </a:spcAft>
+            </a:pPr>
+          </a:p>
+          <a:p>
+            <a:pPr>
+              <a:lnSpc>
+                <a:spcPct val="115000"/>
+              </a:lnSpc>
+              <a:spcAft>
+                <a:spcPts val="1000"/>
+              </a:spcAft>
+            </a:pPr>
+            <a:r>
+              <a:rPr sz="1900" b="1" i="0">
+                <a:solidFill>
+                  <a:srgbClr val="1F2937"/>
+                </a:solidFill>
+                <a:latin typeface="Calibri"/>
+              </a:rPr>
+              <a:t>•  Step 1 — Classify.</a:t>
             </a:r>
           </a:p>
           <a:p>
@@ -6055,7 +6377,7 @@
                 </a:solidFill>
                 <a:latin typeface="Calibri"/>
               </a:rPr>
-              <a:t>—  Three steps is usually enough to be useful and short enough to inspect. Resist adding a fourth.</a:t>
+              <a:t>—  "Read the enquiry. Output one of: DEADLINE, REGISTRATION, GRADES, OTHER. Nothing else."</a:t>
             </a:r>
           </a:p>
           <a:p>
@@ -6074,7 +6396,7 @@
                 </a:solidFill>
                 <a:latin typeface="Calibri"/>
               </a:rPr>
-              <a:t>•  Make every step inspectable.</a:t>
+              <a:t>•  Step 2 — Retrieve and draft.</a:t>
             </a:r>
           </a:p>
           <a:p>
@@ -6093,7 +6415,7 @@
                 </a:solidFill>
                 <a:latin typeface="Calibri"/>
               </a:rPr>
-              <a:t>—  Have it write down what it did at each stage. If you cannot see the middle, you cannot debug the end.</a:t>
+              <a:t>—  "Using only the regulations provided, draft a reply. Quote the clause. If not covered, output NOT IN SOURCES."</a:t>
             </a:r>
           </a:p>
           <a:p>
@@ -6112,7 +6434,7 @@
                 </a:solidFill>
                 <a:latin typeface="Calibri"/>
               </a:rPr>
-              <a:t>•  Put the human before anything irreversible.</a:t>
+              <a:t>•  Step 3 — Format.</a:t>
             </a:r>
           </a:p>
           <a:p>
@@ -6131,7 +6453,7 @@
                 </a:solidFill>
                 <a:latin typeface="Calibri"/>
               </a:rPr>
-              <a:t>—  Drafting, sorting, summarising: automate. Sending, posting, deleting, paying: approve first.</a:t>
+              <a:t>—  "Format as an email with our standard greeting and signature. Change no factual content."</a:t>
             </a:r>
           </a:p>
           <a:p>
@@ -6143,33 +6465,24 @@
                 <a:spcPts val="1000"/>
               </a:spcAft>
             </a:pPr>
-            <a:r>
-              <a:rPr sz="1900" b="1" i="0">
-                <a:solidFill>
-                  <a:srgbClr val="1F2937"/>
-                </a:solidFill>
-                <a:latin typeface="Calibri"/>
-              </a:rPr>
-              <a:t>•  Give it the narrowest tools that do the job.</a:t>
-            </a:r>
-          </a:p>
-          <a:p>
-            <a:pPr lvl="1">
+          </a:p>
+          <a:p>
+            <a:pPr>
               <a:lnSpc>
                 <a:spcPct val="115000"/>
               </a:lnSpc>
               <a:spcAft>
-                <a:spcPts val="500"/>
+                <a:spcPts val="1000"/>
               </a:spcAft>
             </a:pPr>
             <a:r>
-              <a:rPr sz="1600" b="0" i="0">
-                <a:solidFill>
-                  <a:srgbClr val="333D4B"/>
+              <a:rPr sz="1900" b="1" i="0">
+                <a:solidFill>
+                  <a:srgbClr val="1F2937"/>
                 </a:solidFill>
                 <a:latin typeface="Calibri"/>
               </a:rPr>
-              <a:t>—  It cannot misuse a capability it does not have. This is the most reliable control you have.</a:t>
+              <a:t>•  Then: a person reads it and sends it. That is the fourth step, and it is not automated.</a:t>
             </a:r>
           </a:p>
         </p:txBody>
@@ -6263,45 +6576,35 @@
       <p:grpSpPr/>
       <p:sp>
         <p:nvSpPr>
-          <p:cNvPr id="2" name="Rectangle 1"/>
-          <p:cNvSpPr/>
+          <p:cNvPr id="2" name="TextBox 1"/>
+          <p:cNvSpPr txBox="1"/>
           <p:nvPr/>
         </p:nvSpPr>
         <p:spPr>
           <a:xfrm>
-            <a:off x="0" y="0"/>
-            <a:ext cx="12191695" cy="6858000"/>
+            <a:off x="777240" y="566928"/>
+            <a:ext cx="10637215" cy="822960"/>
           </a:xfrm>
           <a:prstGeom prst="rect">
             <a:avLst/>
           </a:prstGeom>
-          <a:solidFill>
-            <a:srgbClr val="F1F5F9"/>
-          </a:solidFill>
-          <a:ln>
-            <a:noFill/>
-          </a:ln>
-          <a:effectLst/>
-        </p:spPr>
-        <p:style>
-          <a:lnRef idx="1">
-            <a:schemeClr val="accent1"/>
-          </a:lnRef>
-          <a:fillRef idx="3">
-            <a:schemeClr val="accent1"/>
-          </a:fillRef>
-          <a:effectRef idx="2">
-            <a:schemeClr val="accent1"/>
-          </a:effectRef>
-          <a:fontRef idx="minor">
-            <a:schemeClr val="lt1"/>
-          </a:fontRef>
-        </p:style>
-        <p:txBody>
-          <a:bodyPr rtlCol="0" anchor="ctr"/>
-          <a:lstStyle/>
-          <a:p>
-            <a:pPr algn="ctr"/>
+          <a:noFill/>
+        </p:spPr>
+        <p:txBody>
+          <a:bodyPr wrap="square" lIns="0" rIns="0" tIns="0" bIns="0">
+            <a:spAutoFit/>
+          </a:bodyPr>
+          <a:lstStyle/>
+          <a:p>
+            <a:r>
+              <a:rPr sz="3000" b="1" i="0">
+                <a:solidFill>
+                  <a:srgbClr val="1F2937"/>
+                </a:solidFill>
+                <a:latin typeface="Calibri Light"/>
+              </a:rPr>
+              <a:t>Worth Automating, and Not</a:t>
+            </a:r>
           </a:p>
         </p:txBody>
       </p:sp>
@@ -6313,8 +6616,8 @@
         </p:nvSpPr>
         <p:spPr>
           <a:xfrm>
-            <a:off x="777240" y="2331720"/>
-            <a:ext cx="1051560" cy="50800"/>
+            <a:off x="777240" y="1417320"/>
+            <a:ext cx="1051560" cy="38100"/>
           </a:xfrm>
           <a:prstGeom prst="rect">
             <a:avLst/>
@@ -6351,14 +6654,542 @@
       </p:sp>
       <p:sp>
         <p:nvSpPr>
-          <p:cNvPr id="4" name="TextBox 3"/>
+          <p:cNvPr id="4" name="Rounded Rectangle 3"/>
+          <p:cNvSpPr/>
+          <p:nvPr/>
+        </p:nvSpPr>
+        <p:spPr>
+          <a:xfrm>
+            <a:off x="777240" y="2057400"/>
+            <a:ext cx="3301898" cy="3200400"/>
+          </a:xfrm>
+          <a:prstGeom prst="roundRect">
+            <a:avLst>
+              <a:gd name="adj" fmla="val 10000"/>
+            </a:avLst>
+          </a:prstGeom>
+          <a:solidFill>
+            <a:srgbClr val="F1F5F9"/>
+          </a:solidFill>
+          <a:ln w="15875">
+            <a:solidFill>
+              <a:srgbClr val="D3DDE6"/>
+            </a:solidFill>
+          </a:ln>
+          <a:effectLst/>
+        </p:spPr>
+        <p:style>
+          <a:lnRef idx="1">
+            <a:schemeClr val="accent1"/>
+          </a:lnRef>
+          <a:fillRef idx="3">
+            <a:schemeClr val="accent1"/>
+          </a:fillRef>
+          <a:effectRef idx="2">
+            <a:schemeClr val="accent1"/>
+          </a:effectRef>
+          <a:fontRef idx="minor">
+            <a:schemeClr val="lt1"/>
+          </a:fontRef>
+        </p:style>
+        <p:txBody>
+          <a:bodyPr rtlCol="0" anchor="ctr"/>
+          <a:lstStyle/>
+          <a:p>
+            <a:pPr algn="ctr"/>
+          </a:p>
+        </p:txBody>
+      </p:sp>
+      <p:sp>
+        <p:nvSpPr>
+          <p:cNvPr id="5" name="Rectangle 4"/>
+          <p:cNvSpPr/>
+          <p:nvPr/>
+        </p:nvSpPr>
+        <p:spPr>
+          <a:xfrm>
+            <a:off x="978408" y="2331720"/>
+            <a:ext cx="640080" cy="38100"/>
+          </a:xfrm>
+          <a:prstGeom prst="rect">
+            <a:avLst/>
+          </a:prstGeom>
+          <a:solidFill>
+            <a:srgbClr val="0F766E"/>
+          </a:solidFill>
+          <a:ln>
+            <a:noFill/>
+          </a:ln>
+          <a:effectLst/>
+        </p:spPr>
+        <p:style>
+          <a:lnRef idx="1">
+            <a:schemeClr val="accent1"/>
+          </a:lnRef>
+          <a:fillRef idx="3">
+            <a:schemeClr val="accent1"/>
+          </a:fillRef>
+          <a:effectRef idx="2">
+            <a:schemeClr val="accent1"/>
+          </a:effectRef>
+          <a:fontRef idx="minor">
+            <a:schemeClr val="lt1"/>
+          </a:fontRef>
+        </p:style>
+        <p:txBody>
+          <a:bodyPr rtlCol="0" anchor="ctr"/>
+          <a:lstStyle/>
+          <a:p>
+            <a:pPr algn="ctr"/>
+          </a:p>
+        </p:txBody>
+      </p:sp>
+      <p:sp>
+        <p:nvSpPr>
+          <p:cNvPr id="6" name="TextBox 5"/>
           <p:cNvSpPr txBox="1"/>
           <p:nvPr/>
         </p:nvSpPr>
         <p:spPr>
           <a:xfrm>
-            <a:off x="777240" y="2697480"/>
-            <a:ext cx="10241280" cy="1828800"/>
+            <a:off x="978408" y="2560320"/>
+            <a:ext cx="2899562" cy="640080"/>
+          </a:xfrm>
+          <a:prstGeom prst="rect">
+            <a:avLst/>
+          </a:prstGeom>
+          <a:noFill/>
+        </p:spPr>
+        <p:txBody>
+          <a:bodyPr wrap="square" lIns="0" rIns="0" tIns="0" bIns="0" anchor="t">
+            <a:spAutoFit/>
+          </a:bodyPr>
+          <a:lstStyle/>
+          <a:p>
+            <a:pPr algn="l">
+              <a:lnSpc>
+                <a:spcPct val="105000"/>
+              </a:lnSpc>
+              <a:spcAft>
+                <a:spcPts val="200"/>
+              </a:spcAft>
+            </a:pPr>
+            <a:r>
+              <a:rPr sz="1800" b="1" i="0">
+                <a:solidFill>
+                  <a:srgbClr val="1F2937"/>
+                </a:solidFill>
+                <a:latin typeface="Calibri"/>
+              </a:rPr>
+              <a:t>Worth it</a:t>
+            </a:r>
+          </a:p>
+        </p:txBody>
+      </p:sp>
+      <p:sp>
+        <p:nvSpPr>
+          <p:cNvPr id="7" name="TextBox 6"/>
+          <p:cNvSpPr txBox="1"/>
+          <p:nvPr/>
+        </p:nvSpPr>
+        <p:spPr>
+          <a:xfrm>
+            <a:off x="978408" y="3246120"/>
+            <a:ext cx="2899562" cy="1737360"/>
+          </a:xfrm>
+          <a:prstGeom prst="rect">
+            <a:avLst/>
+          </a:prstGeom>
+          <a:noFill/>
+        </p:spPr>
+        <p:txBody>
+          <a:bodyPr wrap="square" lIns="0" rIns="0" tIns="0" bIns="0" anchor="t">
+            <a:spAutoFit/>
+          </a:bodyPr>
+          <a:lstStyle/>
+          <a:p>
+            <a:pPr algn="l">
+              <a:lnSpc>
+                <a:spcPct val="105000"/>
+              </a:lnSpc>
+              <a:spcAft>
+                <a:spcPts val="200"/>
+              </a:spcAft>
+            </a:pPr>
+            <a:r>
+              <a:rPr sz="1350" b="0" i="0">
+                <a:solidFill>
+                  <a:srgbClr val="333D4B"/>
+                </a:solidFill>
+                <a:latin typeface="Calibri"/>
+              </a:rPr>
+              <a:t>Sorting a queue by type. Extracting fields from many similar documents. Reformatting between two fixed shapes. Flagging items for attention. All repetitive, all recoverable, all checkable at a glance.</a:t>
+            </a:r>
+          </a:p>
+        </p:txBody>
+      </p:sp>
+      <p:sp>
+        <p:nvSpPr>
+          <p:cNvPr id="8" name="Rounded Rectangle 7"/>
+          <p:cNvSpPr/>
+          <p:nvPr/>
+        </p:nvSpPr>
+        <p:spPr>
+          <a:xfrm>
+            <a:off x="4444898" y="2057400"/>
+            <a:ext cx="3301898" cy="3200400"/>
+          </a:xfrm>
+          <a:prstGeom prst="roundRect">
+            <a:avLst>
+              <a:gd name="adj" fmla="val 10000"/>
+            </a:avLst>
+          </a:prstGeom>
+          <a:solidFill>
+            <a:srgbClr val="F1F5F9"/>
+          </a:solidFill>
+          <a:ln w="15875">
+            <a:solidFill>
+              <a:srgbClr val="D3DDE6"/>
+            </a:solidFill>
+          </a:ln>
+          <a:effectLst/>
+        </p:spPr>
+        <p:style>
+          <a:lnRef idx="1">
+            <a:schemeClr val="accent1"/>
+          </a:lnRef>
+          <a:fillRef idx="3">
+            <a:schemeClr val="accent1"/>
+          </a:fillRef>
+          <a:effectRef idx="2">
+            <a:schemeClr val="accent1"/>
+          </a:effectRef>
+          <a:fontRef idx="minor">
+            <a:schemeClr val="lt1"/>
+          </a:fontRef>
+        </p:style>
+        <p:txBody>
+          <a:bodyPr rtlCol="0" anchor="ctr"/>
+          <a:lstStyle/>
+          <a:p>
+            <a:pPr algn="ctr"/>
+          </a:p>
+        </p:txBody>
+      </p:sp>
+      <p:sp>
+        <p:nvSpPr>
+          <p:cNvPr id="9" name="Rectangle 8"/>
+          <p:cNvSpPr/>
+          <p:nvPr/>
+        </p:nvSpPr>
+        <p:spPr>
+          <a:xfrm>
+            <a:off x="4646066" y="2331720"/>
+            <a:ext cx="640080" cy="38100"/>
+          </a:xfrm>
+          <a:prstGeom prst="rect">
+            <a:avLst/>
+          </a:prstGeom>
+          <a:solidFill>
+            <a:srgbClr val="0F766E"/>
+          </a:solidFill>
+          <a:ln>
+            <a:noFill/>
+          </a:ln>
+          <a:effectLst/>
+        </p:spPr>
+        <p:style>
+          <a:lnRef idx="1">
+            <a:schemeClr val="accent1"/>
+          </a:lnRef>
+          <a:fillRef idx="3">
+            <a:schemeClr val="accent1"/>
+          </a:fillRef>
+          <a:effectRef idx="2">
+            <a:schemeClr val="accent1"/>
+          </a:effectRef>
+          <a:fontRef idx="minor">
+            <a:schemeClr val="lt1"/>
+          </a:fontRef>
+        </p:style>
+        <p:txBody>
+          <a:bodyPr rtlCol="0" anchor="ctr"/>
+          <a:lstStyle/>
+          <a:p>
+            <a:pPr algn="ctr"/>
+          </a:p>
+        </p:txBody>
+      </p:sp>
+      <p:sp>
+        <p:nvSpPr>
+          <p:cNvPr id="10" name="TextBox 9"/>
+          <p:cNvSpPr txBox="1"/>
+          <p:nvPr/>
+        </p:nvSpPr>
+        <p:spPr>
+          <a:xfrm>
+            <a:off x="4646066" y="2560320"/>
+            <a:ext cx="2899562" cy="640080"/>
+          </a:xfrm>
+          <a:prstGeom prst="rect">
+            <a:avLst/>
+          </a:prstGeom>
+          <a:noFill/>
+        </p:spPr>
+        <p:txBody>
+          <a:bodyPr wrap="square" lIns="0" rIns="0" tIns="0" bIns="0" anchor="t">
+            <a:spAutoFit/>
+          </a:bodyPr>
+          <a:lstStyle/>
+          <a:p>
+            <a:pPr algn="l">
+              <a:lnSpc>
+                <a:spcPct val="105000"/>
+              </a:lnSpc>
+              <a:spcAft>
+                <a:spcPts val="200"/>
+              </a:spcAft>
+            </a:pPr>
+            <a:r>
+              <a:rPr sz="1800" b="1" i="0">
+                <a:solidFill>
+                  <a:srgbClr val="1F2937"/>
+                </a:solidFill>
+                <a:latin typeface="Calibri"/>
+              </a:rPr>
+              <a:t>Not worth it</a:t>
+            </a:r>
+          </a:p>
+        </p:txBody>
+      </p:sp>
+      <p:sp>
+        <p:nvSpPr>
+          <p:cNvPr id="11" name="TextBox 10"/>
+          <p:cNvSpPr txBox="1"/>
+          <p:nvPr/>
+        </p:nvSpPr>
+        <p:spPr>
+          <a:xfrm>
+            <a:off x="4646066" y="3246120"/>
+            <a:ext cx="2899562" cy="1737360"/>
+          </a:xfrm>
+          <a:prstGeom prst="rect">
+            <a:avLst/>
+          </a:prstGeom>
+          <a:noFill/>
+        </p:spPr>
+        <p:txBody>
+          <a:bodyPr wrap="square" lIns="0" rIns="0" tIns="0" bIns="0" anchor="t">
+            <a:spAutoFit/>
+          </a:bodyPr>
+          <a:lstStyle/>
+          <a:p>
+            <a:pPr algn="l">
+              <a:lnSpc>
+                <a:spcPct val="105000"/>
+              </a:lnSpc>
+              <a:spcAft>
+                <a:spcPts val="200"/>
+              </a:spcAft>
+            </a:pPr>
+            <a:r>
+              <a:rPr sz="1350" b="0" i="0">
+                <a:solidFill>
+                  <a:srgbClr val="333D4B"/>
+                </a:solidFill>
+                <a:latin typeface="Calibri"/>
+              </a:rPr>
+              <a:t>Anything you do twice a year. Anything where you cannot specify the judgment. Anything whose output goes straight to a person without review.</a:t>
+            </a:r>
+          </a:p>
+        </p:txBody>
+      </p:sp>
+      <p:sp>
+        <p:nvSpPr>
+          <p:cNvPr id="12" name="Rounded Rectangle 11"/>
+          <p:cNvSpPr/>
+          <p:nvPr/>
+        </p:nvSpPr>
+        <p:spPr>
+          <a:xfrm>
+            <a:off x="8112556" y="2057400"/>
+            <a:ext cx="3301898" cy="3200400"/>
+          </a:xfrm>
+          <a:prstGeom prst="roundRect">
+            <a:avLst>
+              <a:gd name="adj" fmla="val 10000"/>
+            </a:avLst>
+          </a:prstGeom>
+          <a:solidFill>
+            <a:srgbClr val="F1F5F9"/>
+          </a:solidFill>
+          <a:ln w="15875">
+            <a:solidFill>
+              <a:srgbClr val="D3DDE6"/>
+            </a:solidFill>
+          </a:ln>
+          <a:effectLst/>
+        </p:spPr>
+        <p:style>
+          <a:lnRef idx="1">
+            <a:schemeClr val="accent1"/>
+          </a:lnRef>
+          <a:fillRef idx="3">
+            <a:schemeClr val="accent1"/>
+          </a:fillRef>
+          <a:effectRef idx="2">
+            <a:schemeClr val="accent1"/>
+          </a:effectRef>
+          <a:fontRef idx="minor">
+            <a:schemeClr val="lt1"/>
+          </a:fontRef>
+        </p:style>
+        <p:txBody>
+          <a:bodyPr rtlCol="0" anchor="ctr"/>
+          <a:lstStyle/>
+          <a:p>
+            <a:pPr algn="ctr"/>
+          </a:p>
+        </p:txBody>
+      </p:sp>
+      <p:sp>
+        <p:nvSpPr>
+          <p:cNvPr id="13" name="Rectangle 12"/>
+          <p:cNvSpPr/>
+          <p:nvPr/>
+        </p:nvSpPr>
+        <p:spPr>
+          <a:xfrm>
+            <a:off x="8313724" y="2331720"/>
+            <a:ext cx="640080" cy="38100"/>
+          </a:xfrm>
+          <a:prstGeom prst="rect">
+            <a:avLst/>
+          </a:prstGeom>
+          <a:solidFill>
+            <a:srgbClr val="0F766E"/>
+          </a:solidFill>
+          <a:ln>
+            <a:noFill/>
+          </a:ln>
+          <a:effectLst/>
+        </p:spPr>
+        <p:style>
+          <a:lnRef idx="1">
+            <a:schemeClr val="accent1"/>
+          </a:lnRef>
+          <a:fillRef idx="3">
+            <a:schemeClr val="accent1"/>
+          </a:fillRef>
+          <a:effectRef idx="2">
+            <a:schemeClr val="accent1"/>
+          </a:effectRef>
+          <a:fontRef idx="minor">
+            <a:schemeClr val="lt1"/>
+          </a:fontRef>
+        </p:style>
+        <p:txBody>
+          <a:bodyPr rtlCol="0" anchor="ctr"/>
+          <a:lstStyle/>
+          <a:p>
+            <a:pPr algn="ctr"/>
+          </a:p>
+        </p:txBody>
+      </p:sp>
+      <p:sp>
+        <p:nvSpPr>
+          <p:cNvPr id="14" name="TextBox 13"/>
+          <p:cNvSpPr txBox="1"/>
+          <p:nvPr/>
+        </p:nvSpPr>
+        <p:spPr>
+          <a:xfrm>
+            <a:off x="8313724" y="2560320"/>
+            <a:ext cx="2899562" cy="640080"/>
+          </a:xfrm>
+          <a:prstGeom prst="rect">
+            <a:avLst/>
+          </a:prstGeom>
+          <a:noFill/>
+        </p:spPr>
+        <p:txBody>
+          <a:bodyPr wrap="square" lIns="0" rIns="0" tIns="0" bIns="0" anchor="t">
+            <a:spAutoFit/>
+          </a:bodyPr>
+          <a:lstStyle/>
+          <a:p>
+            <a:pPr algn="l">
+              <a:lnSpc>
+                <a:spcPct val="105000"/>
+              </a:lnSpc>
+              <a:spcAft>
+                <a:spcPts val="200"/>
+              </a:spcAft>
+            </a:pPr>
+            <a:r>
+              <a:rPr sz="1800" b="1" i="0">
+                <a:solidFill>
+                  <a:srgbClr val="1F2937"/>
+                </a:solidFill>
+                <a:latin typeface="Calibri"/>
+              </a:rPr>
+              <a:t>The honest test</a:t>
+            </a:r>
+          </a:p>
+        </p:txBody>
+      </p:sp>
+      <p:sp>
+        <p:nvSpPr>
+          <p:cNvPr id="15" name="TextBox 14"/>
+          <p:cNvSpPr txBox="1"/>
+          <p:nvPr/>
+        </p:nvSpPr>
+        <p:spPr>
+          <a:xfrm>
+            <a:off x="8313724" y="3246120"/>
+            <a:ext cx="2899562" cy="1737360"/>
+          </a:xfrm>
+          <a:prstGeom prst="rect">
+            <a:avLst/>
+          </a:prstGeom>
+          <a:noFill/>
+        </p:spPr>
+        <p:txBody>
+          <a:bodyPr wrap="square" lIns="0" rIns="0" tIns="0" bIns="0" anchor="t">
+            <a:spAutoFit/>
+          </a:bodyPr>
+          <a:lstStyle/>
+          <a:p>
+            <a:pPr algn="l">
+              <a:lnSpc>
+                <a:spcPct val="105000"/>
+              </a:lnSpc>
+              <a:spcAft>
+                <a:spcPts val="200"/>
+              </a:spcAft>
+            </a:pPr>
+            <a:r>
+              <a:rPr sz="1350" b="0" i="0">
+                <a:solidFill>
+                  <a:srgbClr val="333D4B"/>
+                </a:solidFill>
+                <a:latin typeface="Calibri"/>
+              </a:rPr>
+              <a:t>Would you hand this task, with these instructions, to a capable new colleague on their first day — and let them act on it unsupervised? If not, do not automate it either.</a:t>
+            </a:r>
+          </a:p>
+        </p:txBody>
+      </p:sp>
+      <p:sp>
+        <p:nvSpPr>
+          <p:cNvPr id="16" name="TextBox 15"/>
+          <p:cNvSpPr txBox="1"/>
+          <p:nvPr/>
+        </p:nvSpPr>
+        <p:spPr>
+          <a:xfrm>
+            <a:off x="777240" y="6355080"/>
+            <a:ext cx="10637215" cy="274320"/>
           </a:xfrm>
           <a:prstGeom prst="rect">
             <a:avLst/>
@@ -6372,80 +7203,12 @@
           <a:lstStyle/>
           <a:p>
             <a:r>
-              <a:rPr sz="3200" b="1" i="0">
-                <a:solidFill>
-                  <a:srgbClr val="1F2937"/>
-                </a:solidFill>
-                <a:latin typeface="Calibri Light"/>
-              </a:rPr>
-              <a:t>Most tasks people want to automate are better served by one good prompt.</a:t>
-            </a:r>
-          </a:p>
-        </p:txBody>
-      </p:sp>
-      <p:sp>
-        <p:nvSpPr>
-          <p:cNvPr id="5" name="TextBox 4"/>
-          <p:cNvSpPr txBox="1"/>
-          <p:nvPr/>
-        </p:nvSpPr>
-        <p:spPr>
-          <a:xfrm>
-            <a:off x="777240" y="4434840"/>
-            <a:ext cx="10241280" cy="731520"/>
-          </a:xfrm>
-          <a:prstGeom prst="rect">
-            <a:avLst/>
-          </a:prstGeom>
-          <a:noFill/>
-        </p:spPr>
-        <p:txBody>
-          <a:bodyPr wrap="square" lIns="0" rIns="0" tIns="0" bIns="0">
-            <a:spAutoFit/>
-          </a:bodyPr>
-          <a:lstStyle/>
-          <a:p>
-            <a:r>
-              <a:rPr sz="1800" b="0" i="0">
-                <a:solidFill>
-                  <a:srgbClr val="333D4B"/>
+              <a:rPr sz="1000" b="0" i="0">
+                <a:solidFill>
+                  <a:srgbClr val="6B7787"/>
                 </a:solidFill>
                 <a:latin typeface="Calibri"/>
               </a:rPr>
-              <a:t>Automation is worth it when the task is genuinely repetitive, and the cost of a mistake is low.</a:t>
-            </a:r>
-          </a:p>
-        </p:txBody>
-      </p:sp>
-      <p:sp>
-        <p:nvSpPr>
-          <p:cNvPr id="6" name="TextBox 5"/>
-          <p:cNvSpPr txBox="1"/>
-          <p:nvPr/>
-        </p:nvSpPr>
-        <p:spPr>
-          <a:xfrm>
-            <a:off x="777240" y="6355080"/>
-            <a:ext cx="10637215" cy="274320"/>
-          </a:xfrm>
-          <a:prstGeom prst="rect">
-            <a:avLst/>
-          </a:prstGeom>
-          <a:noFill/>
-        </p:spPr>
-        <p:txBody>
-          <a:bodyPr wrap="square" lIns="0" rIns="0" tIns="0" bIns="0">
-            <a:spAutoFit/>
-          </a:bodyPr>
-          <a:lstStyle/>
-          <a:p>
-            <a:r>
-              <a:rPr sz="1000" b="0" i="0">
-                <a:solidFill>
-                  <a:srgbClr val="6B7787"/>
-                </a:solidFill>
-                <a:latin typeface="Calibri"/>
-              </a:rPr>
               <a:t>Week 9  ·  Prompt Engineering and Large Language Models</a:t>
             </a:r>
           </a:p>
@@ -6453,7 +7216,7 @@
       </p:sp>
       <p:sp>
         <p:nvSpPr>
-          <p:cNvPr id="7" name="TextBox 6"/>
+          <p:cNvPr id="17" name="TextBox 16"/>
           <p:cNvSpPr txBox="1"/>
           <p:nvPr/>
         </p:nvSpPr>
@@ -6506,14 +7269,48 @@
       <p:grpSpPr/>
       <p:sp>
         <p:nvSpPr>
-          <p:cNvPr id="2" name="Rectangle 1"/>
+          <p:cNvPr id="2" name="TextBox 1"/>
+          <p:cNvSpPr txBox="1"/>
+          <p:nvPr/>
+        </p:nvSpPr>
+        <p:spPr>
+          <a:xfrm>
+            <a:off x="777240" y="566928"/>
+            <a:ext cx="10637215" cy="822960"/>
+          </a:xfrm>
+          <a:prstGeom prst="rect">
+            <a:avLst/>
+          </a:prstGeom>
+          <a:noFill/>
+        </p:spPr>
+        <p:txBody>
+          <a:bodyPr wrap="square" lIns="0" rIns="0" tIns="0" bIns="0">
+            <a:spAutoFit/>
+          </a:bodyPr>
+          <a:lstStyle/>
+          <a:p>
+            <a:r>
+              <a:rPr sz="3000" b="1" i="0">
+                <a:solidFill>
+                  <a:srgbClr val="1F2937"/>
+                </a:solidFill>
+                <a:latin typeface="Calibri Light"/>
+              </a:rPr>
+              <a:t>Designing Around It</a:t>
+            </a:r>
+          </a:p>
+        </p:txBody>
+      </p:sp>
+      <p:sp>
+        <p:nvSpPr>
+          <p:cNvPr id="3" name="Rectangle 2"/>
           <p:cNvSpPr/>
           <p:nvPr/>
         </p:nvSpPr>
         <p:spPr>
           <a:xfrm>
-            <a:off x="0" y="0"/>
-            <a:ext cx="292608" cy="6858000"/>
+            <a:off x="777240" y="1417320"/>
+            <a:ext cx="1051560" cy="38100"/>
           </a:xfrm>
           <a:prstGeom prst="rect">
             <a:avLst/>
@@ -6550,14 +7347,14 @@
       </p:sp>
       <p:sp>
         <p:nvSpPr>
-          <p:cNvPr id="3" name="TextBox 2"/>
+          <p:cNvPr id="4" name="TextBox 3"/>
           <p:cNvSpPr txBox="1"/>
           <p:nvPr/>
         </p:nvSpPr>
         <p:spPr>
           <a:xfrm>
-            <a:off x="1280160" y="2743200"/>
-            <a:ext cx="10058400" cy="457200"/>
+            <a:off x="777240" y="1783080"/>
+            <a:ext cx="10637215" cy="4343400"/>
           </a:xfrm>
           <a:prstGeom prst="rect">
             <a:avLst/>
@@ -6570,28 +7367,169 @@
           </a:bodyPr>
           <a:lstStyle/>
           <a:p>
-            <a:r>
-              <a:rPr sz="1400" b="1" i="0">
-                <a:solidFill>
-                  <a:srgbClr val="0F766E"/>
+            <a:pPr>
+              <a:lnSpc>
+                <a:spcPct val="115000"/>
+              </a:lnSpc>
+              <a:spcAft>
+                <a:spcPts val="1000"/>
+              </a:spcAft>
+            </a:pPr>
+            <a:r>
+              <a:rPr sz="1900" b="1" i="0">
+                <a:solidFill>
+                  <a:srgbClr val="1F2937"/>
                 </a:solidFill>
                 <a:latin typeface="Calibri"/>
               </a:rPr>
-              <a:t>PART 3</a:t>
-            </a:r>
-          </a:p>
-        </p:txBody>
-      </p:sp>
-      <p:sp>
-        <p:nvSpPr>
-          <p:cNvPr id="4" name="TextBox 3"/>
+              <a:t>•  Keep the chain short.</a:t>
+            </a:r>
+          </a:p>
+          <a:p>
+            <a:pPr lvl="1">
+              <a:lnSpc>
+                <a:spcPct val="115000"/>
+              </a:lnSpc>
+              <a:spcAft>
+                <a:spcPts val="500"/>
+              </a:spcAft>
+            </a:pPr>
+            <a:r>
+              <a:rPr sz="1600" b="0" i="0">
+                <a:solidFill>
+                  <a:srgbClr val="333D4B"/>
+                </a:solidFill>
+                <a:latin typeface="Calibri"/>
+              </a:rPr>
+              <a:t>—  Three steps is usually enough to be useful and short enough to inspect. Resist adding a fourth.</a:t>
+            </a:r>
+          </a:p>
+          <a:p>
+            <a:pPr>
+              <a:lnSpc>
+                <a:spcPct val="115000"/>
+              </a:lnSpc>
+              <a:spcAft>
+                <a:spcPts val="1000"/>
+              </a:spcAft>
+            </a:pPr>
+            <a:r>
+              <a:rPr sz="1900" b="1" i="0">
+                <a:solidFill>
+                  <a:srgbClr val="1F2937"/>
+                </a:solidFill>
+                <a:latin typeface="Calibri"/>
+              </a:rPr>
+              <a:t>•  Make every step inspectable.</a:t>
+            </a:r>
+          </a:p>
+          <a:p>
+            <a:pPr lvl="1">
+              <a:lnSpc>
+                <a:spcPct val="115000"/>
+              </a:lnSpc>
+              <a:spcAft>
+                <a:spcPts val="500"/>
+              </a:spcAft>
+            </a:pPr>
+            <a:r>
+              <a:rPr sz="1600" b="0" i="0">
+                <a:solidFill>
+                  <a:srgbClr val="333D4B"/>
+                </a:solidFill>
+                <a:latin typeface="Calibri"/>
+              </a:rPr>
+              <a:t>—  Have it write down what it did at each stage. If you cannot see the middle, you cannot debug the end.</a:t>
+            </a:r>
+          </a:p>
+          <a:p>
+            <a:pPr>
+              <a:lnSpc>
+                <a:spcPct val="115000"/>
+              </a:lnSpc>
+              <a:spcAft>
+                <a:spcPts val="1000"/>
+              </a:spcAft>
+            </a:pPr>
+            <a:r>
+              <a:rPr sz="1900" b="1" i="0">
+                <a:solidFill>
+                  <a:srgbClr val="1F2937"/>
+                </a:solidFill>
+                <a:latin typeface="Calibri"/>
+              </a:rPr>
+              <a:t>•  Put the human before anything irreversible.</a:t>
+            </a:r>
+          </a:p>
+          <a:p>
+            <a:pPr lvl="1">
+              <a:lnSpc>
+                <a:spcPct val="115000"/>
+              </a:lnSpc>
+              <a:spcAft>
+                <a:spcPts val="500"/>
+              </a:spcAft>
+            </a:pPr>
+            <a:r>
+              <a:rPr sz="1600" b="0" i="0">
+                <a:solidFill>
+                  <a:srgbClr val="333D4B"/>
+                </a:solidFill>
+                <a:latin typeface="Calibri"/>
+              </a:rPr>
+              <a:t>—  Drafting, sorting, summarising: automate. Sending, posting, deleting, paying: approve first.</a:t>
+            </a:r>
+          </a:p>
+          <a:p>
+            <a:pPr>
+              <a:lnSpc>
+                <a:spcPct val="115000"/>
+              </a:lnSpc>
+              <a:spcAft>
+                <a:spcPts val="1000"/>
+              </a:spcAft>
+            </a:pPr>
+            <a:r>
+              <a:rPr sz="1900" b="1" i="0">
+                <a:solidFill>
+                  <a:srgbClr val="1F2937"/>
+                </a:solidFill>
+                <a:latin typeface="Calibri"/>
+              </a:rPr>
+              <a:t>•  Give it the narrowest tools that do the job.</a:t>
+            </a:r>
+          </a:p>
+          <a:p>
+            <a:pPr lvl="1">
+              <a:lnSpc>
+                <a:spcPct val="115000"/>
+              </a:lnSpc>
+              <a:spcAft>
+                <a:spcPts val="500"/>
+              </a:spcAft>
+            </a:pPr>
+            <a:r>
+              <a:rPr sz="1600" b="0" i="0">
+                <a:solidFill>
+                  <a:srgbClr val="333D4B"/>
+                </a:solidFill>
+                <a:latin typeface="Calibri"/>
+              </a:rPr>
+              <a:t>—  It cannot misuse a capability it does not have. This is the most reliable control you have.</a:t>
+            </a:r>
+          </a:p>
+        </p:txBody>
+      </p:sp>
+      <p:sp>
+        <p:nvSpPr>
+          <p:cNvPr id="5" name="TextBox 4"/>
           <p:cNvSpPr txBox="1"/>
           <p:nvPr/>
         </p:nvSpPr>
         <p:spPr>
           <a:xfrm>
-            <a:off x="1280160" y="3200400"/>
-            <a:ext cx="10058400" cy="1097280"/>
+            <a:off x="777240" y="6355080"/>
+            <a:ext cx="10637215" cy="274320"/>
           </a:xfrm>
           <a:prstGeom prst="rect">
             <a:avLst/>
@@ -6605,13 +7543,48 @@
           <a:lstStyle/>
           <a:p>
             <a:r>
-              <a:rPr sz="3400" b="1" i="0">
-                <a:solidFill>
-                  <a:srgbClr val="1F2937"/>
-                </a:solidFill>
-                <a:latin typeface="Calibri Light"/>
-              </a:rPr>
-              <a:t>Build</a:t>
+              <a:rPr sz="1000" b="0" i="0">
+                <a:solidFill>
+                  <a:srgbClr val="6B7787"/>
+                </a:solidFill>
+                <a:latin typeface="Calibri"/>
+              </a:rPr>
+              <a:t>Week 9  ·  Prompt Engineering and Large Language Models</a:t>
+            </a:r>
+          </a:p>
+        </p:txBody>
+      </p:sp>
+      <p:sp>
+        <p:nvSpPr>
+          <p:cNvPr id="6" name="TextBox 5"/>
+          <p:cNvSpPr txBox="1"/>
+          <p:nvPr/>
+        </p:nvSpPr>
+        <p:spPr>
+          <a:xfrm>
+            <a:off x="10500055" y="6355080"/>
+            <a:ext cx="914400" cy="274320"/>
+          </a:xfrm>
+          <a:prstGeom prst="rect">
+            <a:avLst/>
+          </a:prstGeom>
+          <a:noFill/>
+        </p:spPr>
+        <p:txBody>
+          <a:bodyPr wrap="square" lIns="0" rIns="0" tIns="0" bIns="0">
+            <a:spAutoFit/>
+          </a:bodyPr>
+          <a:lstStyle/>
+          <a:p>
+            <a:pPr algn="r"/>
+            <a:r>
+              <a:rPr sz="1000" b="0" i="0">
+                <a:solidFill>
+                  <a:srgbClr val="6B7787"/>
+                </a:solidFill>
+                <a:latin typeface="Calibri"/>
+              </a:rPr>
+              <a:t>12</a:t>
             </a:r>
           </a:p>
         </p:txBody>
@@ -6636,88 +7609,20 @@
       <p:grpSpPr/>
       <p:sp>
         <p:nvSpPr>
-          <p:cNvPr id="2" name="TextBox 1"/>
-          <p:cNvSpPr txBox="1"/>
+          <p:cNvPr id="2" name="Rectangle 1"/>
+          <p:cNvSpPr/>
           <p:nvPr/>
         </p:nvSpPr>
         <p:spPr>
           <a:xfrm>
-            <a:off x="777240" y="566928"/>
-            <a:ext cx="10637215" cy="365760"/>
+            <a:off x="0" y="0"/>
+            <a:ext cx="12191695" cy="6858000"/>
           </a:xfrm>
           <a:prstGeom prst="rect">
             <a:avLst/>
           </a:prstGeom>
-          <a:noFill/>
-        </p:spPr>
-        <p:txBody>
-          <a:bodyPr wrap="square" lIns="0" rIns="0" tIns="0" bIns="0">
-            <a:spAutoFit/>
-          </a:bodyPr>
-          <a:lstStyle/>
-          <a:p>
-            <a:r>
-              <a:rPr sz="1300" b="1" i="0">
-                <a:solidFill>
-                  <a:srgbClr val="B45309"/>
-                </a:solidFill>
-                <a:latin typeface="Calibri"/>
-              </a:rPr>
-              <a:t>IN-CLASS ACTIVITY  ·  20 MINUTES</a:t>
-            </a:r>
-          </a:p>
-        </p:txBody>
-      </p:sp>
-      <p:sp>
-        <p:nvSpPr>
-          <p:cNvPr id="3" name="TextBox 2"/>
-          <p:cNvSpPr txBox="1"/>
-          <p:nvPr/>
-        </p:nvSpPr>
-        <p:spPr>
-          <a:xfrm>
-            <a:off x="777240" y="960120"/>
-            <a:ext cx="10637215" cy="731520"/>
-          </a:xfrm>
-          <a:prstGeom prst="rect">
-            <a:avLst/>
-          </a:prstGeom>
-          <a:noFill/>
-        </p:spPr>
-        <p:txBody>
-          <a:bodyPr wrap="square" lIns="0" rIns="0" tIns="0" bIns="0">
-            <a:spAutoFit/>
-          </a:bodyPr>
-          <a:lstStyle/>
-          <a:p>
-            <a:r>
-              <a:rPr sz="3000" b="1" i="0">
-                <a:solidFill>
-                  <a:srgbClr val="1F2937"/>
-                </a:solidFill>
-                <a:latin typeface="Calibri Light"/>
-              </a:rPr>
-              <a:t>Build Your Automation Chain</a:t>
-            </a:r>
-          </a:p>
-        </p:txBody>
-      </p:sp>
-      <p:sp>
-        <p:nvSpPr>
-          <p:cNvPr id="4" name="Rectangle 3"/>
-          <p:cNvSpPr/>
-          <p:nvPr/>
-        </p:nvSpPr>
-        <p:spPr>
-          <a:xfrm>
-            <a:off x="777240" y="1783080"/>
-            <a:ext cx="1051560" cy="38100"/>
-          </a:xfrm>
-          <a:prstGeom prst="rect">
-            <a:avLst/>
-          </a:prstGeom>
           <a:solidFill>
-            <a:srgbClr val="B45309"/>
+            <a:srgbClr val="F1F5F9"/>
           </a:solidFill>
           <a:ln>
             <a:noFill/>
@@ -6748,14 +7653,92 @@
       </p:sp>
       <p:sp>
         <p:nvSpPr>
+          <p:cNvPr id="3" name="Rectangle 2"/>
+          <p:cNvSpPr/>
+          <p:nvPr/>
+        </p:nvSpPr>
+        <p:spPr>
+          <a:xfrm>
+            <a:off x="777240" y="2331720"/>
+            <a:ext cx="1051560" cy="50800"/>
+          </a:xfrm>
+          <a:prstGeom prst="rect">
+            <a:avLst/>
+          </a:prstGeom>
+          <a:solidFill>
+            <a:srgbClr val="0F766E"/>
+          </a:solidFill>
+          <a:ln>
+            <a:noFill/>
+          </a:ln>
+          <a:effectLst/>
+        </p:spPr>
+        <p:style>
+          <a:lnRef idx="1">
+            <a:schemeClr val="accent1"/>
+          </a:lnRef>
+          <a:fillRef idx="3">
+            <a:schemeClr val="accent1"/>
+          </a:fillRef>
+          <a:effectRef idx="2">
+            <a:schemeClr val="accent1"/>
+          </a:effectRef>
+          <a:fontRef idx="minor">
+            <a:schemeClr val="lt1"/>
+          </a:fontRef>
+        </p:style>
+        <p:txBody>
+          <a:bodyPr rtlCol="0" anchor="ctr"/>
+          <a:lstStyle/>
+          <a:p>
+            <a:pPr algn="ctr"/>
+          </a:p>
+        </p:txBody>
+      </p:sp>
+      <p:sp>
+        <p:nvSpPr>
+          <p:cNvPr id="4" name="TextBox 3"/>
+          <p:cNvSpPr txBox="1"/>
+          <p:nvPr/>
+        </p:nvSpPr>
+        <p:spPr>
+          <a:xfrm>
+            <a:off x="777240" y="2697480"/>
+            <a:ext cx="10241280" cy="1828800"/>
+          </a:xfrm>
+          <a:prstGeom prst="rect">
+            <a:avLst/>
+          </a:prstGeom>
+          <a:noFill/>
+        </p:spPr>
+        <p:txBody>
+          <a:bodyPr wrap="square" lIns="0" rIns="0" tIns="0" bIns="0">
+            <a:spAutoFit/>
+          </a:bodyPr>
+          <a:lstStyle/>
+          <a:p>
+            <a:r>
+              <a:rPr sz="3200" b="1" i="0">
+                <a:solidFill>
+                  <a:srgbClr val="1F2937"/>
+                </a:solidFill>
+                <a:latin typeface="Calibri Light"/>
+              </a:rPr>
+              <a:t>Most tasks people want to automate are better served by one good prompt.</a:t>
+            </a:r>
+          </a:p>
+        </p:txBody>
+      </p:sp>
+      <p:sp>
+        <p:nvSpPr>
           <p:cNvPr id="5" name="TextBox 4"/>
           <p:cNvSpPr txBox="1"/>
           <p:nvPr/>
         </p:nvSpPr>
         <p:spPr>
           <a:xfrm>
-            <a:off x="777240" y="2148840"/>
-            <a:ext cx="10637215" cy="3931920"/>
+            <a:off x="777240" y="4434840"/>
+            <a:ext cx="10241280" cy="731520"/>
           </a:xfrm>
           <a:prstGeom prst="rect">
             <a:avLst/>
@@ -6768,136 +7751,14 @@
           </a:bodyPr>
           <a:lstStyle/>
           <a:p>
-            <a:pPr>
-              <a:lnSpc>
-                <a:spcPct val="115000"/>
-              </a:lnSpc>
-              <a:spcAft>
-                <a:spcPts val="1000"/>
-              </a:spcAft>
-            </a:pPr>
-            <a:r>
-              <a:rPr sz="1900" b="1" i="0">
-                <a:solidFill>
-                  <a:srgbClr val="1F2937"/>
+            <a:r>
+              <a:rPr sz="1800" b="0" i="0">
+                <a:solidFill>
+                  <a:srgbClr val="333D4B"/>
                 </a:solidFill>
                 <a:latin typeface="Calibri"/>
               </a:rPr>
-              <a:t>•  1.  Pick a repetitive task with three natural stages.</a:t>
-            </a:r>
-          </a:p>
-          <a:p>
-            <a:pPr lvl="1">
-              <a:lnSpc>
-                <a:spcPct val="115000"/>
-              </a:lnSpc>
-              <a:spcAft>
-                <a:spcPts val="500"/>
-              </a:spcAft>
-            </a:pPr>
-            <a:r>
-              <a:rPr sz="1600" b="0" i="0">
-                <a:solidFill>
-                  <a:srgbClr val="333D4B"/>
-                </a:solidFill>
-                <a:latin typeface="Calibri"/>
-              </a:rPr>
-              <a:t>—  Intake → process → format. Read → extract → summarise. Collect → classify → route.</a:t>
-            </a:r>
-          </a:p>
-          <a:p>
-            <a:pPr>
-              <a:lnSpc>
-                <a:spcPct val="115000"/>
-              </a:lnSpc>
-              <a:spcAft>
-                <a:spcPts val="1000"/>
-              </a:spcAft>
-            </a:pPr>
-            <a:r>
-              <a:rPr sz="1900" b="1" i="0">
-                <a:solidFill>
-                  <a:srgbClr val="1F2937"/>
-                </a:solidFill>
-                <a:latin typeface="Calibri"/>
-              </a:rPr>
-              <a:t>•  2.  Write each step as a separate instruction, with its own input and output.</a:t>
-            </a:r>
-          </a:p>
-          <a:p>
-            <a:pPr lvl="1">
-              <a:lnSpc>
-                <a:spcPct val="115000"/>
-              </a:lnSpc>
-              <a:spcAft>
-                <a:spcPts val="500"/>
-              </a:spcAft>
-            </a:pPr>
-            <a:r>
-              <a:rPr sz="1600" b="0" i="0">
-                <a:solidFill>
-                  <a:srgbClr val="333D4B"/>
-                </a:solidFill>
-                <a:latin typeface="Calibri"/>
-              </a:rPr>
-              <a:t>—  Step 2 should not need to know how Step 1 did its job — only what it produced.</a:t>
-            </a:r>
-          </a:p>
-          <a:p>
-            <a:pPr>
-              <a:lnSpc>
-                <a:spcPct val="115000"/>
-              </a:lnSpc>
-              <a:spcAft>
-                <a:spcPts val="1000"/>
-              </a:spcAft>
-            </a:pPr>
-            <a:r>
-              <a:rPr sz="1900" b="1" i="0">
-                <a:solidFill>
-                  <a:srgbClr val="1F2937"/>
-                </a:solidFill>
-                <a:latin typeface="Calibri"/>
-              </a:rPr>
-              <a:t>•  3.  Run it. Then deliberately give Step 1 bad input and watch what Step 3 produces.</a:t>
-            </a:r>
-          </a:p>
-          <a:p>
-            <a:pPr lvl="1">
-              <a:lnSpc>
-                <a:spcPct val="115000"/>
-              </a:lnSpc>
-              <a:spcAft>
-                <a:spcPts val="500"/>
-              </a:spcAft>
-            </a:pPr>
-            <a:r>
-              <a:rPr sz="1600" b="0" i="0">
-                <a:solidFill>
-                  <a:srgbClr val="333D4B"/>
-                </a:solidFill>
-                <a:latin typeface="Calibri"/>
-              </a:rPr>
-              <a:t>—  This is the important part. Note whether anything anywhere signalled a problem.</a:t>
-            </a:r>
-          </a:p>
-          <a:p>
-            <a:pPr>
-              <a:lnSpc>
-                <a:spcPct val="115000"/>
-              </a:lnSpc>
-              <a:spcAft>
-                <a:spcPts val="1000"/>
-              </a:spcAft>
-            </a:pPr>
-            <a:r>
-              <a:rPr sz="1900" b="1" i="0">
-                <a:solidFill>
-                  <a:srgbClr val="1F2937"/>
-                </a:solidFill>
-                <a:latin typeface="Calibri"/>
-              </a:rPr>
-              <a:t>•  4.  Write one sentence: where would you put the human?</a:t>
+              <a:t>Automation is worth it when the task is genuinely repetitive, and the cost of a mistake is low.</a:t>
             </a:r>
           </a:p>
         </p:txBody>
@@ -6991,48 +7852,14 @@
       <p:grpSpPr/>
       <p:sp>
         <p:nvSpPr>
-          <p:cNvPr id="2" name="TextBox 1"/>
-          <p:cNvSpPr txBox="1"/>
-          <p:nvPr/>
-        </p:nvSpPr>
-        <p:spPr>
-          <a:xfrm>
-            <a:off x="777240" y="566928"/>
-            <a:ext cx="10637215" cy="822960"/>
-          </a:xfrm>
-          <a:prstGeom prst="rect">
-            <a:avLst/>
-          </a:prstGeom>
-          <a:noFill/>
-        </p:spPr>
-        <p:txBody>
-          <a:bodyPr wrap="square" lIns="0" rIns="0" tIns="0" bIns="0">
-            <a:spAutoFit/>
-          </a:bodyPr>
-          <a:lstStyle/>
-          <a:p>
-            <a:r>
-              <a:rPr sz="3000" b="1" i="0">
-                <a:solidFill>
-                  <a:srgbClr val="1F2937"/>
-                </a:solidFill>
-                <a:latin typeface="Calibri Light"/>
-              </a:rPr>
-              <a:t>What You Probably Found</a:t>
-            </a:r>
-          </a:p>
-        </p:txBody>
-      </p:sp>
-      <p:sp>
-        <p:nvSpPr>
-          <p:cNvPr id="3" name="Rectangle 2"/>
+          <p:cNvPr id="2" name="Rectangle 1"/>
           <p:cNvSpPr/>
           <p:nvPr/>
         </p:nvSpPr>
         <p:spPr>
           <a:xfrm>
-            <a:off x="777240" y="1417320"/>
-            <a:ext cx="1051560" cy="38100"/>
+            <a:off x="0" y="0"/>
+            <a:ext cx="292608" cy="6858000"/>
           </a:xfrm>
           <a:prstGeom prst="rect">
             <a:avLst/>
@@ -7069,14 +7896,48 @@
       </p:sp>
       <p:sp>
         <p:nvSpPr>
+          <p:cNvPr id="3" name="TextBox 2"/>
+          <p:cNvSpPr txBox="1"/>
+          <p:nvPr/>
+        </p:nvSpPr>
+        <p:spPr>
+          <a:xfrm>
+            <a:off x="1280160" y="2743200"/>
+            <a:ext cx="10058400" cy="457200"/>
+          </a:xfrm>
+          <a:prstGeom prst="rect">
+            <a:avLst/>
+          </a:prstGeom>
+          <a:noFill/>
+        </p:spPr>
+        <p:txBody>
+          <a:bodyPr wrap="square" lIns="0" rIns="0" tIns="0" bIns="0">
+            <a:spAutoFit/>
+          </a:bodyPr>
+          <a:lstStyle/>
+          <a:p>
+            <a:r>
+              <a:rPr sz="1400" b="1" i="0">
+                <a:solidFill>
+                  <a:srgbClr val="0F766E"/>
+                </a:solidFill>
+                <a:latin typeface="Calibri"/>
+              </a:rPr>
+              <a:t>PART 3</a:t>
+            </a:r>
+          </a:p>
+        </p:txBody>
+      </p:sp>
+      <p:sp>
+        <p:nvSpPr>
           <p:cNvPr id="4" name="TextBox 3"/>
           <p:cNvSpPr txBox="1"/>
           <p:nvPr/>
         </p:nvSpPr>
         <p:spPr>
           <a:xfrm>
-            <a:off x="777240" y="1783080"/>
-            <a:ext cx="10637215" cy="4343400"/>
+            <a:off x="1280160" y="3200400"/>
+            <a:ext cx="10058400" cy="1097280"/>
           </a:xfrm>
           <a:prstGeom prst="rect">
             <a:avLst/>
@@ -7089,196 +7950,14 @@
           </a:bodyPr>
           <a:lstStyle/>
           <a:p>
-            <a:pPr lvl="1">
-              <a:lnSpc>
-                <a:spcPct val="115000"/>
-              </a:lnSpc>
-              <a:spcAft>
-                <a:spcPts val="500"/>
-              </a:spcAft>
-            </a:pPr>
-            <a:r>
-              <a:rPr sz="1600" b="0" i="0">
-                <a:solidFill>
-                  <a:srgbClr val="333D4B"/>
-                </a:solidFill>
-                <a:latin typeface="Calibri"/>
-              </a:rPr>
-              <a:t>—  It worked on clean input, and felt genuinely impressive</a:t>
-            </a:r>
-          </a:p>
-          <a:p>
-            <a:pPr lvl="1">
-              <a:lnSpc>
-                <a:spcPct val="115000"/>
-              </a:lnSpc>
-              <a:spcAft>
-                <a:spcPts val="500"/>
-              </a:spcAft>
-            </a:pPr>
-            <a:r>
-              <a:rPr sz="1600" b="0" i="0">
-                <a:solidFill>
-                  <a:srgbClr val="333D4B"/>
-                </a:solidFill>
-                <a:latin typeface="Calibri"/>
-              </a:rPr>
-              <a:t>—  With bad input at step one, step three still produced a confident, well-formatted result</a:t>
-            </a:r>
-          </a:p>
-          <a:p>
-            <a:pPr lvl="1">
-              <a:lnSpc>
-                <a:spcPct val="115000"/>
-              </a:lnSpc>
-              <a:spcAft>
-                <a:spcPts val="500"/>
-              </a:spcAft>
-            </a:pPr>
-            <a:r>
-              <a:rPr sz="1600" b="0" i="0">
-                <a:solidFill>
-                  <a:srgbClr val="333D4B"/>
-                </a:solidFill>
-                <a:latin typeface="Calibri"/>
-              </a:rPr>
-              <a:t>—  Nothing anywhere said "something is wrong"</a:t>
-            </a:r>
-          </a:p>
-          <a:p>
-            <a:pPr lvl="1">
-              <a:lnSpc>
-                <a:spcPct val="115000"/>
-              </a:lnSpc>
-              <a:spcAft>
-                <a:spcPts val="500"/>
-              </a:spcAft>
-            </a:pPr>
-            <a:r>
-              <a:rPr sz="1600" b="0" i="0">
-                <a:solidFill>
-                  <a:srgbClr val="333D4B"/>
-                </a:solidFill>
-                <a:latin typeface="Calibri"/>
-              </a:rPr>
-              <a:t>—  The output looked exactly as good as the correct one</a:t>
-            </a:r>
-          </a:p>
-          <a:p>
-            <a:pPr>
-              <a:lnSpc>
-                <a:spcPct val="115000"/>
-              </a:lnSpc>
-              <a:spcAft>
-                <a:spcPts val="1000"/>
-              </a:spcAft>
-            </a:pPr>
-          </a:p>
-          <a:p>
-            <a:pPr>
-              <a:lnSpc>
-                <a:spcPct val="115000"/>
-              </a:lnSpc>
-              <a:spcAft>
-                <a:spcPts val="1000"/>
-              </a:spcAft>
-            </a:pPr>
-            <a:r>
-              <a:rPr sz="1900" b="1" i="0">
+            <a:r>
+              <a:rPr sz="3400" b="1" i="0">
                 <a:solidFill>
                   <a:srgbClr val="1F2937"/>
                 </a:solidFill>
-                <a:latin typeface="Calibri"/>
-              </a:rPr>
-              <a:t>•  That is silent failure, and you just built it deliberately.</a:t>
-            </a:r>
-          </a:p>
-          <a:p>
-            <a:pPr lvl="1">
-              <a:lnSpc>
-                <a:spcPct val="115000"/>
-              </a:lnSpc>
-              <a:spcAft>
-                <a:spcPts val="500"/>
-              </a:spcAft>
-            </a:pPr>
-            <a:r>
-              <a:rPr sz="1600" b="0" i="0">
-                <a:solidFill>
-                  <a:srgbClr val="333D4B"/>
-                </a:solidFill>
-                <a:latin typeface="Calibri"/>
-              </a:rPr>
-              <a:t>—  In real use you would not have known — which is precisely why the human goes before anything irreversible.</a:t>
-            </a:r>
-          </a:p>
-        </p:txBody>
-      </p:sp>
-      <p:sp>
-        <p:nvSpPr>
-          <p:cNvPr id="5" name="TextBox 4"/>
-          <p:cNvSpPr txBox="1"/>
-          <p:nvPr/>
-        </p:nvSpPr>
-        <p:spPr>
-          <a:xfrm>
-            <a:off x="777240" y="6355080"/>
-            <a:ext cx="10637215" cy="274320"/>
-          </a:xfrm>
-          <a:prstGeom prst="rect">
-            <a:avLst/>
-          </a:prstGeom>
-          <a:noFill/>
-        </p:spPr>
-        <p:txBody>
-          <a:bodyPr wrap="square" lIns="0" rIns="0" tIns="0" bIns="0">
-            <a:spAutoFit/>
-          </a:bodyPr>
-          <a:lstStyle/>
-          <a:p>
-            <a:r>
-              <a:rPr sz="1000" b="0" i="0">
-                <a:solidFill>
-                  <a:srgbClr val="6B7787"/>
-                </a:solidFill>
-                <a:latin typeface="Calibri"/>
-              </a:rPr>
-              <a:t>Week 9  ·  Prompt Engineering and Large Language Models</a:t>
-            </a:r>
-          </a:p>
-        </p:txBody>
-      </p:sp>
-      <p:sp>
-        <p:nvSpPr>
-          <p:cNvPr id="6" name="TextBox 5"/>
-          <p:cNvSpPr txBox="1"/>
-          <p:nvPr/>
-        </p:nvSpPr>
-        <p:spPr>
-          <a:xfrm>
-            <a:off x="10500055" y="6355080"/>
-            <a:ext cx="914400" cy="274320"/>
-          </a:xfrm>
-          <a:prstGeom prst="rect">
-            <a:avLst/>
-          </a:prstGeom>
-          <a:noFill/>
-        </p:spPr>
-        <p:txBody>
-          <a:bodyPr wrap="square" lIns="0" rIns="0" tIns="0" bIns="0">
-            <a:spAutoFit/>
-          </a:bodyPr>
-          <a:lstStyle/>
-          <a:p>
-            <a:pPr algn="r"/>
-            <a:r>
-              <a:rPr sz="1000" b="0" i="0">
-                <a:solidFill>
-                  <a:srgbClr val="6B7787"/>
-                </a:solidFill>
-                <a:latin typeface="Calibri"/>
-              </a:rPr>
-              <a:t>14</a:t>
+                <a:latin typeface="Calibri Light"/>
+              </a:rPr>
+              <a:t>Build</a:t>
             </a:r>
           </a:p>
         </p:txBody>
@@ -7310,7 +7989,7 @@
         <p:spPr>
           <a:xfrm>
             <a:off x="777240" y="566928"/>
-            <a:ext cx="10637215" cy="822960"/>
+            <a:ext cx="10637215" cy="365760"/>
           </a:xfrm>
           <a:prstGeom prst="rect">
             <a:avLst/>
@@ -7324,33 +8003,67 @@
           <a:lstStyle/>
           <a:p>
             <a:r>
+              <a:rPr sz="1300" b="1" i="0">
+                <a:solidFill>
+                  <a:srgbClr val="B45309"/>
+                </a:solidFill>
+                <a:latin typeface="Calibri"/>
+              </a:rPr>
+              <a:t>IN-CLASS ACTIVITY  ·  20 MINUTES</a:t>
+            </a:r>
+          </a:p>
+        </p:txBody>
+      </p:sp>
+      <p:sp>
+        <p:nvSpPr>
+          <p:cNvPr id="3" name="TextBox 2"/>
+          <p:cNvSpPr txBox="1"/>
+          <p:nvPr/>
+        </p:nvSpPr>
+        <p:spPr>
+          <a:xfrm>
+            <a:off x="777240" y="960120"/>
+            <a:ext cx="10637215" cy="731520"/>
+          </a:xfrm>
+          <a:prstGeom prst="rect">
+            <a:avLst/>
+          </a:prstGeom>
+          <a:noFill/>
+        </p:spPr>
+        <p:txBody>
+          <a:bodyPr wrap="square" lIns="0" rIns="0" tIns="0" bIns="0">
+            <a:spAutoFit/>
+          </a:bodyPr>
+          <a:lstStyle/>
+          <a:p>
+            <a:r>
               <a:rPr sz="3000" b="1" i="0">
                 <a:solidFill>
                   <a:srgbClr val="1F2937"/>
                 </a:solidFill>
                 <a:latin typeface="Calibri Light"/>
               </a:rPr>
-              <a:t>Concepts You Must Be Able to Define and Diagnose</a:t>
-            </a:r>
-          </a:p>
-        </p:txBody>
-      </p:sp>
-      <p:sp>
-        <p:nvSpPr>
-          <p:cNvPr id="3" name="Rectangle 2"/>
+              <a:t>Build Your Automation Chain</a:t>
+            </a:r>
+          </a:p>
+        </p:txBody>
+      </p:sp>
+      <p:sp>
+        <p:nvSpPr>
+          <p:cNvPr id="4" name="Rectangle 3"/>
           <p:cNvSpPr/>
           <p:nvPr/>
         </p:nvSpPr>
         <p:spPr>
           <a:xfrm>
-            <a:off x="777240" y="1417320"/>
+            <a:off x="777240" y="1783080"/>
             <a:ext cx="1051560" cy="38100"/>
           </a:xfrm>
           <a:prstGeom prst="rect">
             <a:avLst/>
           </a:prstGeom>
           <a:solidFill>
-            <a:srgbClr val="0F766E"/>
+            <a:srgbClr val="B45309"/>
           </a:solidFill>
           <a:ln>
             <a:noFill/>
@@ -7381,58 +8094,14 @@
       </p:sp>
       <p:sp>
         <p:nvSpPr>
-          <p:cNvPr id="4" name="Rectangle 3"/>
-          <p:cNvSpPr/>
-          <p:nvPr/>
-        </p:nvSpPr>
-        <p:spPr>
-          <a:xfrm>
-            <a:off x="777240" y="1783080"/>
-            <a:ext cx="10637215" cy="4251960"/>
-          </a:xfrm>
-          <a:prstGeom prst="rect">
-            <a:avLst/>
-          </a:prstGeom>
-          <a:solidFill>
-            <a:srgbClr val="F1F5F9"/>
-          </a:solidFill>
-          <a:ln>
-            <a:noFill/>
-          </a:ln>
-          <a:effectLst/>
-        </p:spPr>
-        <p:style>
-          <a:lnRef idx="1">
-            <a:schemeClr val="accent1"/>
-          </a:lnRef>
-          <a:fillRef idx="3">
-            <a:schemeClr val="accent1"/>
-          </a:fillRef>
-          <a:effectRef idx="2">
-            <a:schemeClr val="accent1"/>
-          </a:effectRef>
-          <a:fontRef idx="minor">
-            <a:schemeClr val="lt1"/>
-          </a:fontRef>
-        </p:style>
-        <p:txBody>
-          <a:bodyPr rtlCol="0" anchor="ctr"/>
-          <a:lstStyle/>
-          <a:p>
-            <a:pPr algn="ctr"/>
-          </a:p>
-        </p:txBody>
-      </p:sp>
-      <p:sp>
-        <p:nvSpPr>
           <p:cNvPr id="5" name="TextBox 4"/>
           <p:cNvSpPr txBox="1"/>
           <p:nvPr/>
         </p:nvSpPr>
         <p:spPr>
           <a:xfrm>
-            <a:off x="1188720" y="2103120"/>
-            <a:ext cx="9814255" cy="3611880"/>
+            <a:off x="777240" y="2148840"/>
+            <a:ext cx="10637215" cy="3931920"/>
           </a:xfrm>
           <a:prstGeom prst="rect">
             <a:avLst/>
@@ -7460,7 +8129,7 @@
                 </a:solidFill>
                 <a:latin typeface="Calibri"/>
               </a:rPr>
-              <a:t>•  Agent vs chatbot</a:t>
+              <a:t>•  1.  Pick a repetitive task with three natural stages.</a:t>
             </a:r>
           </a:p>
           <a:p>
@@ -7479,7 +8148,7 @@
                 </a:solidFill>
                 <a:latin typeface="Calibri"/>
               </a:rPr>
-              <a:t>—  A chatbot answers one step with you reading it; an agent takes several steps and you see only the ends. You lose the checks you were performing unconsciously.</a:t>
+              <a:t>—  Intake → process → format. Read → extract → summarise. Collect → classify → route.</a:t>
             </a:r>
           </a:p>
           <a:p>
@@ -7498,7 +8167,7 @@
                 </a:solidFill>
                 <a:latin typeface="Calibri"/>
               </a:rPr>
-              <a:t>•  The loop</a:t>
+              <a:t>•  2.  Write each step as a separate instruction, with its own input and output.</a:t>
             </a:r>
           </a:p>
           <a:p>
@@ -7517,7 +8186,7 @@
                 </a:solidFill>
                 <a:latin typeface="Calibri"/>
               </a:rPr>
-              <a:t>—  Goal → plan → act → observe → repeat until it decides it is done. Termination is a judgment it makes poorly.</a:t>
+              <a:t>—  Step 2 should not need to know how Step 1 did its job — only what it produced.</a:t>
             </a:r>
           </a:p>
           <a:p>
@@ -7536,7 +8205,7 @@
                 </a:solidFill>
                 <a:latin typeface="Calibri"/>
               </a:rPr>
-              <a:t>•  Tool use</a:t>
+              <a:t>•  3.  Run it. Then deliberately give Step 1 bad input and watch what Step 3 produces.</a:t>
             </a:r>
           </a:p>
           <a:p>
@@ -7555,7 +8224,7 @@
                 </a:solidFill>
                 <a:latin typeface="Calibri"/>
               </a:rPr>
-              <a:t>—  The model requests an action; the surrounding system performs it and returns the result as text into the context.</a:t>
+              <a:t>—  This is the important part. Note whether anything anywhere signalled a problem.</a:t>
             </a:r>
           </a:p>
           <a:p>
@@ -7574,64 +8243,7 @@
                 </a:solidFill>
                 <a:latin typeface="Calibri"/>
               </a:rPr>
-              <a:t>•  Compounding error</a:t>
-            </a:r>
-          </a:p>
-          <a:p>
-            <a:pPr lvl="1">
-              <a:lnSpc>
-                <a:spcPct val="115000"/>
-              </a:lnSpc>
-              <a:spcAft>
-                <a:spcPts val="500"/>
-              </a:spcAft>
-            </a:pPr>
-            <a:r>
-              <a:rPr sz="1600" b="0" i="0">
-                <a:solidFill>
-                  <a:srgbClr val="333D4B"/>
-                </a:solidFill>
-                <a:latin typeface="Calibri"/>
-              </a:rPr>
-              <a:t>—  95% per step is ~60% over ten steps. Errors are inherited by later steps, not averaged away.</a:t>
-            </a:r>
-          </a:p>
-          <a:p>
-            <a:pPr>
-              <a:lnSpc>
-                <a:spcPct val="115000"/>
-              </a:lnSpc>
-              <a:spcAft>
-                <a:spcPts val="1000"/>
-              </a:spcAft>
-            </a:pPr>
-            <a:r>
-              <a:rPr sz="1900" b="1" i="0">
-                <a:solidFill>
-                  <a:srgbClr val="1F2937"/>
-                </a:solidFill>
-                <a:latin typeface="Calibri"/>
-              </a:rPr>
-              <a:t>•  Three agent failures · four design rules</a:t>
-            </a:r>
-          </a:p>
-          <a:p>
-            <a:pPr lvl="1">
-              <a:lnSpc>
-                <a:spcPct val="115000"/>
-              </a:lnSpc>
-              <a:spcAft>
-                <a:spcPts val="500"/>
-              </a:spcAft>
-            </a:pPr>
-            <a:r>
-              <a:rPr sz="1600" b="0" i="0">
-                <a:solidFill>
-                  <a:srgbClr val="333D4B"/>
-                </a:solidFill>
-                <a:latin typeface="Calibri"/>
-              </a:rPr>
-              <a:t>—  Silent failure · wrong stopping point · cost and volume.  Short chains · inspectable steps · human before irreversible actions · narrowest tools.</a:t>
+              <a:t>•  4.  Write one sentence: where would you put the human?</a:t>
             </a:r>
           </a:p>
         </p:txBody>
@@ -7752,7 +8364,7 @@
                 </a:solidFill>
                 <a:latin typeface="Calibri Light"/>
               </a:rPr>
-              <a:t>Wrap-Up</a:t>
+              <a:t>What You Probably Found</a:t>
             </a:r>
           </a:p>
         </p:txBody>
@@ -7822,6 +8434,82 @@
             <a:spAutoFit/>
           </a:bodyPr>
           <a:lstStyle/>
+          <a:p>
+            <a:pPr lvl="1">
+              <a:lnSpc>
+                <a:spcPct val="115000"/>
+              </a:lnSpc>
+              <a:spcAft>
+                <a:spcPts val="500"/>
+              </a:spcAft>
+            </a:pPr>
+            <a:r>
+              <a:rPr sz="1600" b="0" i="0">
+                <a:solidFill>
+                  <a:srgbClr val="333D4B"/>
+                </a:solidFill>
+                <a:latin typeface="Calibri"/>
+              </a:rPr>
+              <a:t>—  It worked on clean input, and felt genuinely impressive</a:t>
+            </a:r>
+          </a:p>
+          <a:p>
+            <a:pPr lvl="1">
+              <a:lnSpc>
+                <a:spcPct val="115000"/>
+              </a:lnSpc>
+              <a:spcAft>
+                <a:spcPts val="500"/>
+              </a:spcAft>
+            </a:pPr>
+            <a:r>
+              <a:rPr sz="1600" b="0" i="0">
+                <a:solidFill>
+                  <a:srgbClr val="333D4B"/>
+                </a:solidFill>
+                <a:latin typeface="Calibri"/>
+              </a:rPr>
+              <a:t>—  With bad input at step one, step three still produced a confident, well-formatted result</a:t>
+            </a:r>
+          </a:p>
+          <a:p>
+            <a:pPr lvl="1">
+              <a:lnSpc>
+                <a:spcPct val="115000"/>
+              </a:lnSpc>
+              <a:spcAft>
+                <a:spcPts val="500"/>
+              </a:spcAft>
+            </a:pPr>
+            <a:r>
+              <a:rPr sz="1600" b="0" i="0">
+                <a:solidFill>
+                  <a:srgbClr val="333D4B"/>
+                </a:solidFill>
+                <a:latin typeface="Calibri"/>
+              </a:rPr>
+              <a:t>—  Nothing anywhere said "something is wrong"</a:t>
+            </a:r>
+          </a:p>
+          <a:p>
+            <a:pPr lvl="1">
+              <a:lnSpc>
+                <a:spcPct val="115000"/>
+              </a:lnSpc>
+              <a:spcAft>
+                <a:spcPts val="500"/>
+              </a:spcAft>
+            </a:pPr>
+            <a:r>
+              <a:rPr sz="1600" b="0" i="0">
+                <a:solidFill>
+                  <a:srgbClr val="333D4B"/>
+                </a:solidFill>
+                <a:latin typeface="Calibri"/>
+              </a:rPr>
+              <a:t>—  The output looked exactly as good as the correct one</a:t>
+            </a:r>
+          </a:p>
           <a:p>
             <a:pPr>
               <a:lnSpc>
@@ -7831,15 +8519,6 @@
                 <a:spcPts val="1000"/>
               </a:spcAft>
             </a:pPr>
-            <a:r>
-              <a:rPr sz="1900" b="0" i="0">
-                <a:solidFill>
-                  <a:srgbClr val="1F2937"/>
-                </a:solidFill>
-                <a:latin typeface="Calibri"/>
-              </a:rPr>
-              <a:t>•  An agent acts across several steps; you lose the checking you were doing for free</a:t>
-            </a:r>
           </a:p>
           <a:p>
             <a:pPr>
@@ -7857,93 +8536,7 @@
                 </a:solidFill>
                 <a:latin typeface="Calibri"/>
               </a:rPr>
-              <a:t>•  95% per step is about 60% over ten steps — and errors are inherited, not averaged</a:t>
-            </a:r>
-          </a:p>
-          <a:p>
-            <a:pPr>
-              <a:lnSpc>
-                <a:spcPct val="115000"/>
-              </a:lnSpc>
-              <a:spcAft>
-                <a:spcPts val="1000"/>
-              </a:spcAft>
-            </a:pPr>
-            <a:r>
-              <a:rPr sz="1900" b="0" i="0">
-                <a:solidFill>
-                  <a:srgbClr val="1F2937"/>
-                </a:solidFill>
-                <a:latin typeface="Calibri"/>
-              </a:rPr>
-              <a:t>•  Silent failure is the characteristic agent problem: wrong input, confident output, no signal</a:t>
-            </a:r>
-          </a:p>
-          <a:p>
-            <a:pPr>
-              <a:lnSpc>
-                <a:spcPct val="115000"/>
-              </a:lnSpc>
-              <a:spcAft>
-                <a:spcPts val="1000"/>
-              </a:spcAft>
-            </a:pPr>
-            <a:r>
-              <a:rPr sz="1900" b="0" i="0">
-                <a:solidFill>
-                  <a:srgbClr val="1F2937"/>
-                </a:solidFill>
-                <a:latin typeface="Calibri"/>
-              </a:rPr>
-              <a:t>•  Short chains · inspectable steps · human before anything irreversible · narrowest tools</a:t>
-            </a:r>
-          </a:p>
-          <a:p>
-            <a:pPr>
-              <a:lnSpc>
-                <a:spcPct val="115000"/>
-              </a:lnSpc>
-              <a:spcAft>
-                <a:spcPts val="1000"/>
-              </a:spcAft>
-            </a:pPr>
-            <a:r>
-              <a:rPr sz="1900" b="0" i="0">
-                <a:solidFill>
-                  <a:srgbClr val="1F2937"/>
-                </a:solidFill>
-                <a:latin typeface="Calibri"/>
-              </a:rPr>
-              <a:t>•  Most tasks are better served by one good prompt</a:t>
-            </a:r>
-          </a:p>
-          <a:p>
-            <a:pPr>
-              <a:lnSpc>
-                <a:spcPct val="115000"/>
-              </a:lnSpc>
-              <a:spcAft>
-                <a:spcPts val="1000"/>
-              </a:spcAft>
-            </a:pPr>
-          </a:p>
-          <a:p>
-            <a:pPr>
-              <a:lnSpc>
-                <a:spcPct val="115000"/>
-              </a:lnSpc>
-              <a:spcAft>
-                <a:spcPts val="1000"/>
-              </a:spcAft>
-            </a:pPr>
-            <a:r>
-              <a:rPr sz="1900" b="1" i="0">
-                <a:solidFill>
-                  <a:srgbClr val="1F2937"/>
-                </a:solidFill>
-                <a:latin typeface="Calibri"/>
-              </a:rPr>
-              <a:t>•  Next week:</a:t>
+              <a:t>•  That is silent failure, and you just built it deliberately.</a:t>
             </a:r>
           </a:p>
           <a:p>
@@ -7962,7 +8555,7 @@
                 </a:solidFill>
                 <a:latin typeface="Calibri"/>
               </a:rPr>
-              <a:t>—  Building for Your Own Field — you design something end to end for your own discipline</a:t>
+              <a:t>—  In real use you would not have known — which is precisely why the human goes before anything irreversible.</a:t>
             </a:r>
           </a:p>
         </p:txBody>
@@ -8045,6 +8638,759 @@
 </file>
 
 <file path=ppt/slides/slide17.xml><?xml version="1.0" encoding="utf-8"?>
+<p:sld xmlns:a="http://schemas.openxmlformats.org/drawingml/2006/main" xmlns:p="http://schemas.openxmlformats.org/presentationml/2006/main" xmlns:r="http://schemas.openxmlformats.org/officeDocument/2006/relationships">
+  <p:cSld>
+    <p:spTree>
+      <p:nvGrpSpPr>
+        <p:cNvPr id="1" name=""/>
+        <p:cNvGrpSpPr/>
+        <p:nvPr/>
+      </p:nvGrpSpPr>
+      <p:grpSpPr/>
+      <p:sp>
+        <p:nvSpPr>
+          <p:cNvPr id="2" name="TextBox 1"/>
+          <p:cNvSpPr txBox="1"/>
+          <p:nvPr/>
+        </p:nvSpPr>
+        <p:spPr>
+          <a:xfrm>
+            <a:off x="777240" y="566928"/>
+            <a:ext cx="10637215" cy="822960"/>
+          </a:xfrm>
+          <a:prstGeom prst="rect">
+            <a:avLst/>
+          </a:prstGeom>
+          <a:noFill/>
+        </p:spPr>
+        <p:txBody>
+          <a:bodyPr wrap="square" lIns="0" rIns="0" tIns="0" bIns="0">
+            <a:spAutoFit/>
+          </a:bodyPr>
+          <a:lstStyle/>
+          <a:p>
+            <a:r>
+              <a:rPr sz="3000" b="1" i="0">
+                <a:solidFill>
+                  <a:srgbClr val="1F2937"/>
+                </a:solidFill>
+                <a:latin typeface="Calibri Light"/>
+              </a:rPr>
+              <a:t>Concepts You Must Be Able to Define and Diagnose</a:t>
+            </a:r>
+          </a:p>
+        </p:txBody>
+      </p:sp>
+      <p:sp>
+        <p:nvSpPr>
+          <p:cNvPr id="3" name="Rectangle 2"/>
+          <p:cNvSpPr/>
+          <p:nvPr/>
+        </p:nvSpPr>
+        <p:spPr>
+          <a:xfrm>
+            <a:off x="777240" y="1417320"/>
+            <a:ext cx="1051560" cy="38100"/>
+          </a:xfrm>
+          <a:prstGeom prst="rect">
+            <a:avLst/>
+          </a:prstGeom>
+          <a:solidFill>
+            <a:srgbClr val="0F766E"/>
+          </a:solidFill>
+          <a:ln>
+            <a:noFill/>
+          </a:ln>
+          <a:effectLst/>
+        </p:spPr>
+        <p:style>
+          <a:lnRef idx="1">
+            <a:schemeClr val="accent1"/>
+          </a:lnRef>
+          <a:fillRef idx="3">
+            <a:schemeClr val="accent1"/>
+          </a:fillRef>
+          <a:effectRef idx="2">
+            <a:schemeClr val="accent1"/>
+          </a:effectRef>
+          <a:fontRef idx="minor">
+            <a:schemeClr val="lt1"/>
+          </a:fontRef>
+        </p:style>
+        <p:txBody>
+          <a:bodyPr rtlCol="0" anchor="ctr"/>
+          <a:lstStyle/>
+          <a:p>
+            <a:pPr algn="ctr"/>
+          </a:p>
+        </p:txBody>
+      </p:sp>
+      <p:sp>
+        <p:nvSpPr>
+          <p:cNvPr id="4" name="Rectangle 3"/>
+          <p:cNvSpPr/>
+          <p:nvPr/>
+        </p:nvSpPr>
+        <p:spPr>
+          <a:xfrm>
+            <a:off x="777240" y="1783080"/>
+            <a:ext cx="10637215" cy="4251960"/>
+          </a:xfrm>
+          <a:prstGeom prst="rect">
+            <a:avLst/>
+          </a:prstGeom>
+          <a:solidFill>
+            <a:srgbClr val="F1F5F9"/>
+          </a:solidFill>
+          <a:ln>
+            <a:noFill/>
+          </a:ln>
+          <a:effectLst/>
+        </p:spPr>
+        <p:style>
+          <a:lnRef idx="1">
+            <a:schemeClr val="accent1"/>
+          </a:lnRef>
+          <a:fillRef idx="3">
+            <a:schemeClr val="accent1"/>
+          </a:fillRef>
+          <a:effectRef idx="2">
+            <a:schemeClr val="accent1"/>
+          </a:effectRef>
+          <a:fontRef idx="minor">
+            <a:schemeClr val="lt1"/>
+          </a:fontRef>
+        </p:style>
+        <p:txBody>
+          <a:bodyPr rtlCol="0" anchor="ctr"/>
+          <a:lstStyle/>
+          <a:p>
+            <a:pPr algn="ctr"/>
+          </a:p>
+        </p:txBody>
+      </p:sp>
+      <p:sp>
+        <p:nvSpPr>
+          <p:cNvPr id="5" name="TextBox 4"/>
+          <p:cNvSpPr txBox="1"/>
+          <p:nvPr/>
+        </p:nvSpPr>
+        <p:spPr>
+          <a:xfrm>
+            <a:off x="1188720" y="2103120"/>
+            <a:ext cx="9814255" cy="3611880"/>
+          </a:xfrm>
+          <a:prstGeom prst="rect">
+            <a:avLst/>
+          </a:prstGeom>
+          <a:noFill/>
+        </p:spPr>
+        <p:txBody>
+          <a:bodyPr wrap="square" lIns="0" rIns="0" tIns="0" bIns="0">
+            <a:spAutoFit/>
+          </a:bodyPr>
+          <a:lstStyle/>
+          <a:p>
+            <a:pPr>
+              <a:lnSpc>
+                <a:spcPct val="115000"/>
+              </a:lnSpc>
+              <a:spcAft>
+                <a:spcPts val="1000"/>
+              </a:spcAft>
+            </a:pPr>
+            <a:r>
+              <a:rPr sz="1900" b="1" i="0">
+                <a:solidFill>
+                  <a:srgbClr val="1F2937"/>
+                </a:solidFill>
+                <a:latin typeface="Calibri"/>
+              </a:rPr>
+              <a:t>•  Agent vs chatbot</a:t>
+            </a:r>
+          </a:p>
+          <a:p>
+            <a:pPr lvl="1">
+              <a:lnSpc>
+                <a:spcPct val="115000"/>
+              </a:lnSpc>
+              <a:spcAft>
+                <a:spcPts val="500"/>
+              </a:spcAft>
+            </a:pPr>
+            <a:r>
+              <a:rPr sz="1600" b="0" i="0">
+                <a:solidFill>
+                  <a:srgbClr val="333D4B"/>
+                </a:solidFill>
+                <a:latin typeface="Calibri"/>
+              </a:rPr>
+              <a:t>—  A chatbot answers one step with you reading it; an agent takes several steps and you see only the ends. You lose the checks you were performing unconsciously.</a:t>
+            </a:r>
+          </a:p>
+          <a:p>
+            <a:pPr>
+              <a:lnSpc>
+                <a:spcPct val="115000"/>
+              </a:lnSpc>
+              <a:spcAft>
+                <a:spcPts val="1000"/>
+              </a:spcAft>
+            </a:pPr>
+            <a:r>
+              <a:rPr sz="1900" b="1" i="0">
+                <a:solidFill>
+                  <a:srgbClr val="1F2937"/>
+                </a:solidFill>
+                <a:latin typeface="Calibri"/>
+              </a:rPr>
+              <a:t>•  The loop</a:t>
+            </a:r>
+          </a:p>
+          <a:p>
+            <a:pPr lvl="1">
+              <a:lnSpc>
+                <a:spcPct val="115000"/>
+              </a:lnSpc>
+              <a:spcAft>
+                <a:spcPts val="500"/>
+              </a:spcAft>
+            </a:pPr>
+            <a:r>
+              <a:rPr sz="1600" b="0" i="0">
+                <a:solidFill>
+                  <a:srgbClr val="333D4B"/>
+                </a:solidFill>
+                <a:latin typeface="Calibri"/>
+              </a:rPr>
+              <a:t>—  Goal → plan → act → observe → repeat until it decides it is done. Termination is a judgment it makes poorly.</a:t>
+            </a:r>
+          </a:p>
+          <a:p>
+            <a:pPr>
+              <a:lnSpc>
+                <a:spcPct val="115000"/>
+              </a:lnSpc>
+              <a:spcAft>
+                <a:spcPts val="1000"/>
+              </a:spcAft>
+            </a:pPr>
+            <a:r>
+              <a:rPr sz="1900" b="1" i="0">
+                <a:solidFill>
+                  <a:srgbClr val="1F2937"/>
+                </a:solidFill>
+                <a:latin typeface="Calibri"/>
+              </a:rPr>
+              <a:t>•  Tool use</a:t>
+            </a:r>
+          </a:p>
+          <a:p>
+            <a:pPr lvl="1">
+              <a:lnSpc>
+                <a:spcPct val="115000"/>
+              </a:lnSpc>
+              <a:spcAft>
+                <a:spcPts val="500"/>
+              </a:spcAft>
+            </a:pPr>
+            <a:r>
+              <a:rPr sz="1600" b="0" i="0">
+                <a:solidFill>
+                  <a:srgbClr val="333D4B"/>
+                </a:solidFill>
+                <a:latin typeface="Calibri"/>
+              </a:rPr>
+              <a:t>—  The model requests an action; the surrounding system performs it and returns the result as text into the context.</a:t>
+            </a:r>
+          </a:p>
+          <a:p>
+            <a:pPr>
+              <a:lnSpc>
+                <a:spcPct val="115000"/>
+              </a:lnSpc>
+              <a:spcAft>
+                <a:spcPts val="1000"/>
+              </a:spcAft>
+            </a:pPr>
+            <a:r>
+              <a:rPr sz="1900" b="1" i="0">
+                <a:solidFill>
+                  <a:srgbClr val="1F2937"/>
+                </a:solidFill>
+                <a:latin typeface="Calibri"/>
+              </a:rPr>
+              <a:t>•  Compounding error</a:t>
+            </a:r>
+          </a:p>
+          <a:p>
+            <a:pPr lvl="1">
+              <a:lnSpc>
+                <a:spcPct val="115000"/>
+              </a:lnSpc>
+              <a:spcAft>
+                <a:spcPts val="500"/>
+              </a:spcAft>
+            </a:pPr>
+            <a:r>
+              <a:rPr sz="1600" b="0" i="0">
+                <a:solidFill>
+                  <a:srgbClr val="333D4B"/>
+                </a:solidFill>
+                <a:latin typeface="Calibri"/>
+              </a:rPr>
+              <a:t>—  95% per step is ~60% over ten steps. Errors are inherited by later steps, not averaged away.</a:t>
+            </a:r>
+          </a:p>
+          <a:p>
+            <a:pPr>
+              <a:lnSpc>
+                <a:spcPct val="115000"/>
+              </a:lnSpc>
+              <a:spcAft>
+                <a:spcPts val="1000"/>
+              </a:spcAft>
+            </a:pPr>
+            <a:r>
+              <a:rPr sz="1900" b="1" i="0">
+                <a:solidFill>
+                  <a:srgbClr val="1F2937"/>
+                </a:solidFill>
+                <a:latin typeface="Calibri"/>
+              </a:rPr>
+              <a:t>•  Three agent failures · four design rules</a:t>
+            </a:r>
+          </a:p>
+          <a:p>
+            <a:pPr lvl="1">
+              <a:lnSpc>
+                <a:spcPct val="115000"/>
+              </a:lnSpc>
+              <a:spcAft>
+                <a:spcPts val="500"/>
+              </a:spcAft>
+            </a:pPr>
+            <a:r>
+              <a:rPr sz="1600" b="0" i="0">
+                <a:solidFill>
+                  <a:srgbClr val="333D4B"/>
+                </a:solidFill>
+                <a:latin typeface="Calibri"/>
+              </a:rPr>
+              <a:t>—  Silent failure · wrong stopping point · cost and volume.  Short chains · inspectable steps · human before irreversible actions · narrowest tools.</a:t>
+            </a:r>
+          </a:p>
+        </p:txBody>
+      </p:sp>
+      <p:sp>
+        <p:nvSpPr>
+          <p:cNvPr id="6" name="TextBox 5"/>
+          <p:cNvSpPr txBox="1"/>
+          <p:nvPr/>
+        </p:nvSpPr>
+        <p:spPr>
+          <a:xfrm>
+            <a:off x="777240" y="6355080"/>
+            <a:ext cx="10637215" cy="274320"/>
+          </a:xfrm>
+          <a:prstGeom prst="rect">
+            <a:avLst/>
+          </a:prstGeom>
+          <a:noFill/>
+        </p:spPr>
+        <p:txBody>
+          <a:bodyPr wrap="square" lIns="0" rIns="0" tIns="0" bIns="0">
+            <a:spAutoFit/>
+          </a:bodyPr>
+          <a:lstStyle/>
+          <a:p>
+            <a:r>
+              <a:rPr sz="1000" b="0" i="0">
+                <a:solidFill>
+                  <a:srgbClr val="6B7787"/>
+                </a:solidFill>
+                <a:latin typeface="Calibri"/>
+              </a:rPr>
+              <a:t>Week 9  ·  Prompt Engineering and Large Language Models</a:t>
+            </a:r>
+          </a:p>
+        </p:txBody>
+      </p:sp>
+      <p:sp>
+        <p:nvSpPr>
+          <p:cNvPr id="7" name="TextBox 6"/>
+          <p:cNvSpPr txBox="1"/>
+          <p:nvPr/>
+        </p:nvSpPr>
+        <p:spPr>
+          <a:xfrm>
+            <a:off x="10500055" y="6355080"/>
+            <a:ext cx="914400" cy="274320"/>
+          </a:xfrm>
+          <a:prstGeom prst="rect">
+            <a:avLst/>
+          </a:prstGeom>
+          <a:noFill/>
+        </p:spPr>
+        <p:txBody>
+          <a:bodyPr wrap="square" lIns="0" rIns="0" tIns="0" bIns="0">
+            <a:spAutoFit/>
+          </a:bodyPr>
+          <a:lstStyle/>
+          <a:p>
+            <a:pPr algn="r"/>
+            <a:r>
+              <a:rPr sz="1000" b="0" i="0">
+                <a:solidFill>
+                  <a:srgbClr val="6B7787"/>
+                </a:solidFill>
+                <a:latin typeface="Calibri"/>
+              </a:rPr>
+              <a:t>17</a:t>
+            </a:r>
+          </a:p>
+        </p:txBody>
+      </p:sp>
+    </p:spTree>
+  </p:cSld>
+  <p:clrMapOvr>
+    <a:masterClrMapping/>
+  </p:clrMapOvr>
+</p:sld>
+</file>
+
+<file path=ppt/slides/slide18.xml><?xml version="1.0" encoding="utf-8"?>
+<p:sld xmlns:a="http://schemas.openxmlformats.org/drawingml/2006/main" xmlns:p="http://schemas.openxmlformats.org/presentationml/2006/main" xmlns:r="http://schemas.openxmlformats.org/officeDocument/2006/relationships">
+  <p:cSld>
+    <p:spTree>
+      <p:nvGrpSpPr>
+        <p:cNvPr id="1" name=""/>
+        <p:cNvGrpSpPr/>
+        <p:nvPr/>
+      </p:nvGrpSpPr>
+      <p:grpSpPr/>
+      <p:sp>
+        <p:nvSpPr>
+          <p:cNvPr id="2" name="TextBox 1"/>
+          <p:cNvSpPr txBox="1"/>
+          <p:nvPr/>
+        </p:nvSpPr>
+        <p:spPr>
+          <a:xfrm>
+            <a:off x="777240" y="566928"/>
+            <a:ext cx="10637215" cy="822960"/>
+          </a:xfrm>
+          <a:prstGeom prst="rect">
+            <a:avLst/>
+          </a:prstGeom>
+          <a:noFill/>
+        </p:spPr>
+        <p:txBody>
+          <a:bodyPr wrap="square" lIns="0" rIns="0" tIns="0" bIns="0">
+            <a:spAutoFit/>
+          </a:bodyPr>
+          <a:lstStyle/>
+          <a:p>
+            <a:r>
+              <a:rPr sz="3000" b="1" i="0">
+                <a:solidFill>
+                  <a:srgbClr val="1F2937"/>
+                </a:solidFill>
+                <a:latin typeface="Calibri Light"/>
+              </a:rPr>
+              <a:t>Wrap-Up</a:t>
+            </a:r>
+          </a:p>
+        </p:txBody>
+      </p:sp>
+      <p:sp>
+        <p:nvSpPr>
+          <p:cNvPr id="3" name="Rectangle 2"/>
+          <p:cNvSpPr/>
+          <p:nvPr/>
+        </p:nvSpPr>
+        <p:spPr>
+          <a:xfrm>
+            <a:off x="777240" y="1417320"/>
+            <a:ext cx="1051560" cy="38100"/>
+          </a:xfrm>
+          <a:prstGeom prst="rect">
+            <a:avLst/>
+          </a:prstGeom>
+          <a:solidFill>
+            <a:srgbClr val="0F766E"/>
+          </a:solidFill>
+          <a:ln>
+            <a:noFill/>
+          </a:ln>
+          <a:effectLst/>
+        </p:spPr>
+        <p:style>
+          <a:lnRef idx="1">
+            <a:schemeClr val="accent1"/>
+          </a:lnRef>
+          <a:fillRef idx="3">
+            <a:schemeClr val="accent1"/>
+          </a:fillRef>
+          <a:effectRef idx="2">
+            <a:schemeClr val="accent1"/>
+          </a:effectRef>
+          <a:fontRef idx="minor">
+            <a:schemeClr val="lt1"/>
+          </a:fontRef>
+        </p:style>
+        <p:txBody>
+          <a:bodyPr rtlCol="0" anchor="ctr"/>
+          <a:lstStyle/>
+          <a:p>
+            <a:pPr algn="ctr"/>
+          </a:p>
+        </p:txBody>
+      </p:sp>
+      <p:sp>
+        <p:nvSpPr>
+          <p:cNvPr id="4" name="TextBox 3"/>
+          <p:cNvSpPr txBox="1"/>
+          <p:nvPr/>
+        </p:nvSpPr>
+        <p:spPr>
+          <a:xfrm>
+            <a:off x="777240" y="1783080"/>
+            <a:ext cx="10637215" cy="4343400"/>
+          </a:xfrm>
+          <a:prstGeom prst="rect">
+            <a:avLst/>
+          </a:prstGeom>
+          <a:noFill/>
+        </p:spPr>
+        <p:txBody>
+          <a:bodyPr wrap="square" lIns="0" rIns="0" tIns="0" bIns="0">
+            <a:spAutoFit/>
+          </a:bodyPr>
+          <a:lstStyle/>
+          <a:p>
+            <a:pPr>
+              <a:lnSpc>
+                <a:spcPct val="115000"/>
+              </a:lnSpc>
+              <a:spcAft>
+                <a:spcPts val="1000"/>
+              </a:spcAft>
+            </a:pPr>
+            <a:r>
+              <a:rPr sz="1900" b="0" i="0">
+                <a:solidFill>
+                  <a:srgbClr val="1F2937"/>
+                </a:solidFill>
+                <a:latin typeface="Calibri"/>
+              </a:rPr>
+              <a:t>•  An agent acts across several steps; you lose the checking you were doing for free</a:t>
+            </a:r>
+          </a:p>
+          <a:p>
+            <a:pPr>
+              <a:lnSpc>
+                <a:spcPct val="115000"/>
+              </a:lnSpc>
+              <a:spcAft>
+                <a:spcPts val="1000"/>
+              </a:spcAft>
+            </a:pPr>
+            <a:r>
+              <a:rPr sz="1900" b="1" i="0">
+                <a:solidFill>
+                  <a:srgbClr val="1F2937"/>
+                </a:solidFill>
+                <a:latin typeface="Calibri"/>
+              </a:rPr>
+              <a:t>•  95% per step is about 60% over ten steps — and errors are inherited, not averaged</a:t>
+            </a:r>
+          </a:p>
+          <a:p>
+            <a:pPr>
+              <a:lnSpc>
+                <a:spcPct val="115000"/>
+              </a:lnSpc>
+              <a:spcAft>
+                <a:spcPts val="1000"/>
+              </a:spcAft>
+            </a:pPr>
+            <a:r>
+              <a:rPr sz="1900" b="0" i="0">
+                <a:solidFill>
+                  <a:srgbClr val="1F2937"/>
+                </a:solidFill>
+                <a:latin typeface="Calibri"/>
+              </a:rPr>
+              <a:t>•  Silent failure is the characteristic agent problem: wrong input, confident output, no signal</a:t>
+            </a:r>
+          </a:p>
+          <a:p>
+            <a:pPr>
+              <a:lnSpc>
+                <a:spcPct val="115000"/>
+              </a:lnSpc>
+              <a:spcAft>
+                <a:spcPts val="1000"/>
+              </a:spcAft>
+            </a:pPr>
+            <a:r>
+              <a:rPr sz="1900" b="0" i="0">
+                <a:solidFill>
+                  <a:srgbClr val="1F2937"/>
+                </a:solidFill>
+                <a:latin typeface="Calibri"/>
+              </a:rPr>
+              <a:t>•  Short chains · inspectable steps · human before anything irreversible · narrowest tools</a:t>
+            </a:r>
+          </a:p>
+          <a:p>
+            <a:pPr>
+              <a:lnSpc>
+                <a:spcPct val="115000"/>
+              </a:lnSpc>
+              <a:spcAft>
+                <a:spcPts val="1000"/>
+              </a:spcAft>
+            </a:pPr>
+            <a:r>
+              <a:rPr sz="1900" b="0" i="0">
+                <a:solidFill>
+                  <a:srgbClr val="1F2937"/>
+                </a:solidFill>
+                <a:latin typeface="Calibri"/>
+              </a:rPr>
+              <a:t>•  Most tasks are better served by one good prompt</a:t>
+            </a:r>
+          </a:p>
+          <a:p>
+            <a:pPr>
+              <a:lnSpc>
+                <a:spcPct val="115000"/>
+              </a:lnSpc>
+              <a:spcAft>
+                <a:spcPts val="1000"/>
+              </a:spcAft>
+            </a:pPr>
+          </a:p>
+          <a:p>
+            <a:pPr>
+              <a:lnSpc>
+                <a:spcPct val="115000"/>
+              </a:lnSpc>
+              <a:spcAft>
+                <a:spcPts val="1000"/>
+              </a:spcAft>
+            </a:pPr>
+            <a:r>
+              <a:rPr sz="1900" b="1" i="0">
+                <a:solidFill>
+                  <a:srgbClr val="1F2937"/>
+                </a:solidFill>
+                <a:latin typeface="Calibri"/>
+              </a:rPr>
+              <a:t>•  Next week:</a:t>
+            </a:r>
+          </a:p>
+          <a:p>
+            <a:pPr lvl="1">
+              <a:lnSpc>
+                <a:spcPct val="115000"/>
+              </a:lnSpc>
+              <a:spcAft>
+                <a:spcPts val="500"/>
+              </a:spcAft>
+            </a:pPr>
+            <a:r>
+              <a:rPr sz="1600" b="0" i="0">
+                <a:solidFill>
+                  <a:srgbClr val="333D4B"/>
+                </a:solidFill>
+                <a:latin typeface="Calibri"/>
+              </a:rPr>
+              <a:t>—  Building for Your Own Field — you design something end to end for your own discipline</a:t>
+            </a:r>
+          </a:p>
+        </p:txBody>
+      </p:sp>
+      <p:sp>
+        <p:nvSpPr>
+          <p:cNvPr id="5" name="TextBox 4"/>
+          <p:cNvSpPr txBox="1"/>
+          <p:nvPr/>
+        </p:nvSpPr>
+        <p:spPr>
+          <a:xfrm>
+            <a:off x="777240" y="6355080"/>
+            <a:ext cx="10637215" cy="274320"/>
+          </a:xfrm>
+          <a:prstGeom prst="rect">
+            <a:avLst/>
+          </a:prstGeom>
+          <a:noFill/>
+        </p:spPr>
+        <p:txBody>
+          <a:bodyPr wrap="square" lIns="0" rIns="0" tIns="0" bIns="0">
+            <a:spAutoFit/>
+          </a:bodyPr>
+          <a:lstStyle/>
+          <a:p>
+            <a:r>
+              <a:rPr sz="1000" b="0" i="0">
+                <a:solidFill>
+                  <a:srgbClr val="6B7787"/>
+                </a:solidFill>
+                <a:latin typeface="Calibri"/>
+              </a:rPr>
+              <a:t>Week 9  ·  Prompt Engineering and Large Language Models</a:t>
+            </a:r>
+          </a:p>
+        </p:txBody>
+      </p:sp>
+      <p:sp>
+        <p:nvSpPr>
+          <p:cNvPr id="6" name="TextBox 5"/>
+          <p:cNvSpPr txBox="1"/>
+          <p:nvPr/>
+        </p:nvSpPr>
+        <p:spPr>
+          <a:xfrm>
+            <a:off x="10500055" y="6355080"/>
+            <a:ext cx="914400" cy="274320"/>
+          </a:xfrm>
+          <a:prstGeom prst="rect">
+            <a:avLst/>
+          </a:prstGeom>
+          <a:noFill/>
+        </p:spPr>
+        <p:txBody>
+          <a:bodyPr wrap="square" lIns="0" rIns="0" tIns="0" bIns="0">
+            <a:spAutoFit/>
+          </a:bodyPr>
+          <a:lstStyle/>
+          <a:p>
+            <a:pPr algn="r"/>
+            <a:r>
+              <a:rPr sz="1000" b="0" i="0">
+                <a:solidFill>
+                  <a:srgbClr val="6B7787"/>
+                </a:solidFill>
+                <a:latin typeface="Calibri"/>
+              </a:rPr>
+              <a:t>18</a:t>
+            </a:r>
+          </a:p>
+        </p:txBody>
+      </p:sp>
+    </p:spTree>
+  </p:cSld>
+  <p:clrMapOvr>
+    <a:masterClrMapping/>
+  </p:clrMapOvr>
+</p:sld>
+</file>
+
+<file path=ppt/slides/slide19.xml><?xml version="1.0" encoding="utf-8"?>
 <p:sld xmlns:a="http://schemas.openxmlformats.org/drawingml/2006/main" xmlns:p="http://schemas.openxmlformats.org/presentationml/2006/main" xmlns:r="http://schemas.openxmlformats.org/officeDocument/2006/relationships">
   <p:cSld>
     <p:spTree>
